--- a/python_bootcamp/ Python101.pptx
+++ b/python_bootcamp/ Python101.pptx
@@ -5,27 +5,28 @@
     <p:sldMasterId id="2147483672" r:id="rId1"/>
   </p:sldMasterIdLst>
   <p:notesMasterIdLst>
-    <p:notesMasterId r:id="rId20"/>
+    <p:notesMasterId r:id="rId21"/>
   </p:notesMasterIdLst>
   <p:sldIdLst>
-    <p:sldId id="324" r:id="rId2"/>
-    <p:sldId id="325" r:id="rId3"/>
-    <p:sldId id="294" r:id="rId4"/>
-    <p:sldId id="323" r:id="rId5"/>
-    <p:sldId id="317" r:id="rId6"/>
-    <p:sldId id="316" r:id="rId7"/>
+    <p:sldId id="327" r:id="rId2"/>
+    <p:sldId id="294" r:id="rId3"/>
+    <p:sldId id="323" r:id="rId4"/>
+    <p:sldId id="317" r:id="rId5"/>
+    <p:sldId id="316" r:id="rId6"/>
+    <p:sldId id="328" r:id="rId7"/>
     <p:sldId id="321" r:id="rId8"/>
     <p:sldId id="322" r:id="rId9"/>
     <p:sldId id="315" r:id="rId10"/>
     <p:sldId id="318" r:id="rId11"/>
     <p:sldId id="319" r:id="rId12"/>
-    <p:sldId id="313" r:id="rId13"/>
-    <p:sldId id="301" r:id="rId14"/>
-    <p:sldId id="304" r:id="rId15"/>
-    <p:sldId id="305" r:id="rId16"/>
-    <p:sldId id="312" r:id="rId17"/>
-    <p:sldId id="326" r:id="rId18"/>
-    <p:sldId id="292" r:id="rId19"/>
+    <p:sldId id="329" r:id="rId13"/>
+    <p:sldId id="313" r:id="rId14"/>
+    <p:sldId id="301" r:id="rId15"/>
+    <p:sldId id="304" r:id="rId16"/>
+    <p:sldId id="305" r:id="rId17"/>
+    <p:sldId id="312" r:id="rId18"/>
+    <p:sldId id="326" r:id="rId19"/>
+    <p:sldId id="292" r:id="rId20"/>
   </p:sldIdLst>
   <p:sldSz cx="12192000" cy="6858000"/>
   <p:notesSz cx="6858000" cy="9144000"/>
@@ -214,7 +215,7 @@
           <a:p>
             <a:fld id="{4FB655EC-3BDD-8748-9DAB-B505E0EBC127}" type="datetimeFigureOut">
               <a:rPr lang="en-US" smtClean="0"/>
-              <a:t>6/13/23</a:t>
+              <a:t>3/17/26</a:t>
             </a:fld>
             <a:endParaRPr lang="en-US"/>
           </a:p>
@@ -612,7 +613,7 @@
           <a:p>
             <a:fld id="{0B80924F-1C89-9F4D-AA8B-982AFE68DED4}" type="datetimeFigureOut">
               <a:rPr lang="en-US" smtClean="0"/>
-              <a:t>6/13/23</a:t>
+              <a:t>3/17/26</a:t>
             </a:fld>
             <a:endParaRPr lang="en-US"/>
           </a:p>
@@ -782,7 +783,7 @@
           <a:p>
             <a:fld id="{0B80924F-1C89-9F4D-AA8B-982AFE68DED4}" type="datetimeFigureOut">
               <a:rPr lang="en-US" smtClean="0"/>
-              <a:t>6/13/23</a:t>
+              <a:t>3/17/26</a:t>
             </a:fld>
             <a:endParaRPr lang="en-US"/>
           </a:p>
@@ -962,7 +963,7 @@
           <a:p>
             <a:fld id="{0B80924F-1C89-9F4D-AA8B-982AFE68DED4}" type="datetimeFigureOut">
               <a:rPr lang="en-US" smtClean="0"/>
-              <a:t>6/13/23</a:t>
+              <a:t>3/17/26</a:t>
             </a:fld>
             <a:endParaRPr lang="en-US"/>
           </a:p>
@@ -1132,7 +1133,7 @@
           <a:p>
             <a:fld id="{0B80924F-1C89-9F4D-AA8B-982AFE68DED4}" type="datetimeFigureOut">
               <a:rPr lang="en-US" smtClean="0"/>
-              <a:t>6/13/23</a:t>
+              <a:t>3/17/26</a:t>
             </a:fld>
             <a:endParaRPr lang="en-US"/>
           </a:p>
@@ -1378,7 +1379,7 @@
           <a:p>
             <a:fld id="{0B80924F-1C89-9F4D-AA8B-982AFE68DED4}" type="datetimeFigureOut">
               <a:rPr lang="en-US" smtClean="0"/>
-              <a:t>6/13/23</a:t>
+              <a:t>3/17/26</a:t>
             </a:fld>
             <a:endParaRPr lang="en-US"/>
           </a:p>
@@ -1610,7 +1611,7 @@
           <a:p>
             <a:fld id="{0B80924F-1C89-9F4D-AA8B-982AFE68DED4}" type="datetimeFigureOut">
               <a:rPr lang="en-US" smtClean="0"/>
-              <a:t>6/13/23</a:t>
+              <a:t>3/17/26</a:t>
             </a:fld>
             <a:endParaRPr lang="en-US"/>
           </a:p>
@@ -1977,7 +1978,7 @@
           <a:p>
             <a:fld id="{0B80924F-1C89-9F4D-AA8B-982AFE68DED4}" type="datetimeFigureOut">
               <a:rPr lang="en-US" smtClean="0"/>
-              <a:t>6/13/23</a:t>
+              <a:t>3/17/26</a:t>
             </a:fld>
             <a:endParaRPr lang="en-US"/>
           </a:p>
@@ -2095,7 +2096,7 @@
           <a:p>
             <a:fld id="{0B80924F-1C89-9F4D-AA8B-982AFE68DED4}" type="datetimeFigureOut">
               <a:rPr lang="en-US" smtClean="0"/>
-              <a:t>6/13/23</a:t>
+              <a:t>3/17/26</a:t>
             </a:fld>
             <a:endParaRPr lang="en-US"/>
           </a:p>
@@ -2190,7 +2191,7 @@
           <a:p>
             <a:fld id="{0B80924F-1C89-9F4D-AA8B-982AFE68DED4}" type="datetimeFigureOut">
               <a:rPr lang="en-US" smtClean="0"/>
-              <a:t>6/13/23</a:t>
+              <a:t>3/17/26</a:t>
             </a:fld>
             <a:endParaRPr lang="en-US"/>
           </a:p>
@@ -2467,7 +2468,7 @@
           <a:p>
             <a:fld id="{0B80924F-1C89-9F4D-AA8B-982AFE68DED4}" type="datetimeFigureOut">
               <a:rPr lang="en-US" smtClean="0"/>
-              <a:t>6/13/23</a:t>
+              <a:t>3/17/26</a:t>
             </a:fld>
             <a:endParaRPr lang="en-US"/>
           </a:p>
@@ -2724,7 +2725,7 @@
           <a:p>
             <a:fld id="{0B80924F-1C89-9F4D-AA8B-982AFE68DED4}" type="datetimeFigureOut">
               <a:rPr lang="en-US" smtClean="0"/>
-              <a:t>6/13/23</a:t>
+              <a:t>3/17/26</a:t>
             </a:fld>
             <a:endParaRPr lang="en-US"/>
           </a:p>
@@ -2937,7 +2938,7 @@
           <a:p>
             <a:fld id="{0B80924F-1C89-9F4D-AA8B-982AFE68DED4}" type="datetimeFigureOut">
               <a:rPr lang="en-US" smtClean="0"/>
-              <a:t>6/13/23</a:t>
+              <a:t>3/17/26</a:t>
             </a:fld>
             <a:endParaRPr lang="en-US"/>
           </a:p>
@@ -3328,6 +3329,14 @@
 <file path=ppt/slides/slide1.xml><?xml version="1.0" encoding="utf-8"?>
 <p:sld xmlns:a="http://schemas.openxmlformats.org/drawingml/2006/main" xmlns:r="http://schemas.openxmlformats.org/officeDocument/2006/relationships" xmlns:p="http://schemas.openxmlformats.org/presentationml/2006/main">
   <p:cSld>
+    <p:bg>
+      <p:bgPr>
+        <a:solidFill>
+          <a:schemeClr val="bg1"/>
+        </a:solidFill>
+        <a:effectLst/>
+      </p:bgPr>
+    </p:bg>
     <p:spTree>
       <p:nvGrpSpPr>
         <p:cNvPr id="1" name=""/>
@@ -3342,333 +3351,40 @@
           <a:chExt cx="0" cy="0"/>
         </a:xfrm>
       </p:grpSpPr>
-      <p:grpSp>
-        <p:nvGrpSpPr>
-          <p:cNvPr id="16" name="Group 15">
+      <p:sp useBgFill="1">
+        <p:nvSpPr>
+          <p:cNvPr id="13" name="Slide Background">
             <a:extLst>
               <a:ext uri="{FF2B5EF4-FFF2-40B4-BE49-F238E27FC236}">
-                <a16:creationId xmlns:a16="http://schemas.microsoft.com/office/drawing/2014/main" id="{767AABFA-A691-784C-55BA-D31BCCF5D4AD}"/>
+                <a16:creationId xmlns:a16="http://schemas.microsoft.com/office/drawing/2014/main" id="{649C91A9-84E7-4BF0-9026-62F01380D853}"/>
+              </a:ext>
+              <a:ext uri="{C183D7F6-B498-43B3-948B-1728B52AA6E4}">
+                <adec:decorative xmlns:adec="http://schemas.microsoft.com/office/drawing/2017/decorative" val="1"/>
               </a:ext>
             </a:extLst>
           </p:cNvPr>
-          <p:cNvGrpSpPr/>
-          <p:nvPr/>
-        </p:nvGrpSpPr>
-        <p:grpSpPr>
+          <p:cNvSpPr>
+            <a:spLocks noGrp="1" noRot="1" noChangeAspect="1" noMove="1" noResize="1" noEditPoints="1" noAdjustHandles="1" noChangeArrowheads="1" noChangeShapeType="1" noTextEdit="1"/>
+          </p:cNvSpPr>
+          <p:nvPr>
+            <p:extLst>
+              <p:ext uri="{386F3935-93C4-4BCD-93E2-E3B085C9AB24}">
+                <p16:designElem xmlns:p16="http://schemas.microsoft.com/office/powerpoint/2015/main" val="1"/>
+              </p:ext>
+            </p:extLst>
+          </p:nvPr>
+        </p:nvSpPr>
+        <p:spPr bwMode="white">
           <a:xfrm>
-            <a:off x="0" y="-213221"/>
-            <a:ext cx="10020924" cy="6885776"/>
-            <a:chOff x="1" y="-222648"/>
-            <a:chExt cx="9851855" cy="6746085"/>
-          </a:xfrm>
-        </p:grpSpPr>
-        <p:grpSp>
-          <p:nvGrpSpPr>
-            <p:cNvPr id="9" name="Group 8">
-              <a:extLst>
-                <a:ext uri="{FF2B5EF4-FFF2-40B4-BE49-F238E27FC236}">
-                  <a16:creationId xmlns:a16="http://schemas.microsoft.com/office/drawing/2014/main" id="{11917B8D-DDFE-359D-9511-6FF243A666D5}"/>
-                </a:ext>
-              </a:extLst>
-            </p:cNvPr>
-            <p:cNvGrpSpPr/>
-            <p:nvPr/>
-          </p:nvGrpSpPr>
-          <p:grpSpPr>
-            <a:xfrm>
-              <a:off x="1" y="-222648"/>
-              <a:ext cx="9851855" cy="5851456"/>
-              <a:chOff x="1" y="-222648"/>
-              <a:chExt cx="9851855" cy="5851456"/>
-            </a:xfrm>
-          </p:grpSpPr>
-          <p:pic>
-            <p:nvPicPr>
-              <p:cNvPr id="6" name="Picture 5" descr="A picture containing text, screenshot, design&#10;&#10;Description automatically generated">
-                <a:extLst>
-                  <a:ext uri="{FF2B5EF4-FFF2-40B4-BE49-F238E27FC236}">
-                    <a16:creationId xmlns:a16="http://schemas.microsoft.com/office/drawing/2014/main" id="{809D0B7D-B301-C8C1-4C80-6EB2DA29AE9E}"/>
-                  </a:ext>
-                </a:extLst>
-              </p:cNvPr>
-              <p:cNvPicPr>
-                <a:picLocks noChangeAspect="1"/>
-              </p:cNvPicPr>
-              <p:nvPr/>
-            </p:nvPicPr>
-            <p:blipFill rotWithShape="1">
-              <a:blip r:embed="rId2">
-                <a:extLst>
-                  <a:ext uri="{28A0092B-C50C-407E-A947-70E740481C1C}">
-                    <a14:useLocalDpi xmlns:a14="http://schemas.microsoft.com/office/drawing/2010/main" val="0"/>
-                  </a:ext>
-                </a:extLst>
-              </a:blip>
-              <a:srcRect l="1355"/>
-              <a:stretch/>
-            </p:blipFill>
-            <p:spPr>
-              <a:xfrm>
-                <a:off x="1" y="-222648"/>
-                <a:ext cx="9851855" cy="5746524"/>
-              </a:xfrm>
-              <a:prstGeom prst="rect">
-                <a:avLst/>
-              </a:prstGeom>
-            </p:spPr>
-          </p:pic>
-          <p:sp>
-            <p:nvSpPr>
-              <p:cNvPr id="4" name="Rectangle 3">
-                <a:extLst>
-                  <a:ext uri="{FF2B5EF4-FFF2-40B4-BE49-F238E27FC236}">
-                    <a16:creationId xmlns:a16="http://schemas.microsoft.com/office/drawing/2014/main" id="{F33424E2-9190-74A6-69F3-1EC89798CA17}"/>
-                  </a:ext>
-                </a:extLst>
-              </p:cNvPr>
-              <p:cNvSpPr/>
-              <p:nvPr/>
-            </p:nvSpPr>
-            <p:spPr>
-              <a:xfrm>
-                <a:off x="6445770" y="2323476"/>
-                <a:ext cx="3222886" cy="3305332"/>
-              </a:xfrm>
-              <a:prstGeom prst="rect">
-                <a:avLst/>
-              </a:prstGeom>
-              <a:solidFill>
-                <a:schemeClr val="bg1"/>
-              </a:solidFill>
-              <a:ln>
-                <a:noFill/>
-              </a:ln>
-            </p:spPr>
-            <p:style>
-              <a:lnRef idx="2">
-                <a:schemeClr val="accent1">
-                  <a:shade val="50000"/>
-                </a:schemeClr>
-              </a:lnRef>
-              <a:fillRef idx="1">
-                <a:schemeClr val="accent1"/>
-              </a:fillRef>
-              <a:effectRef idx="0">
-                <a:schemeClr val="accent1"/>
-              </a:effectRef>
-              <a:fontRef idx="minor">
-                <a:schemeClr val="lt1"/>
-              </a:fontRef>
-            </p:style>
-            <p:txBody>
-              <a:bodyPr rtlCol="0" anchor="ctr"/>
-              <a:lstStyle/>
-              <a:p>
-                <a:pPr algn="ctr"/>
-                <a:endParaRPr lang="en-US" dirty="0"/>
-              </a:p>
-            </p:txBody>
-          </p:sp>
-        </p:grpSp>
-        <p:pic>
-          <p:nvPicPr>
-            <p:cNvPr id="12" name="Picture 11" descr="A black and yellow gears&#10;&#10;Description automatically generated with low confidence">
-              <a:extLst>
-                <a:ext uri="{FF2B5EF4-FFF2-40B4-BE49-F238E27FC236}">
-                  <a16:creationId xmlns:a16="http://schemas.microsoft.com/office/drawing/2014/main" id="{55480BAC-04BB-D0A0-4DC4-7030DD28E63D}"/>
-                </a:ext>
-              </a:extLst>
-            </p:cNvPr>
-            <p:cNvPicPr>
-              <a:picLocks noChangeAspect="1"/>
-            </p:cNvPicPr>
-            <p:nvPr/>
-          </p:nvPicPr>
-          <p:blipFill>
-            <a:blip r:embed="rId3">
-              <a:extLst>
-                <a:ext uri="{28A0092B-C50C-407E-A947-70E740481C1C}">
-                  <a14:useLocalDpi xmlns:a14="http://schemas.microsoft.com/office/drawing/2010/main" val="0"/>
-                </a:ext>
-              </a:extLst>
-            </a:blip>
-            <a:stretch>
-              <a:fillRect/>
-            </a:stretch>
-          </p:blipFill>
-          <p:spPr>
-            <a:xfrm rot="11403472">
-              <a:off x="483282" y="5608958"/>
-              <a:ext cx="3837003" cy="914479"/>
-            </a:xfrm>
-            <a:prstGeom prst="rect">
-              <a:avLst/>
-            </a:prstGeom>
-          </p:spPr>
-        </p:pic>
-        <p:pic>
-          <p:nvPicPr>
-            <p:cNvPr id="13" name="Picture 12" descr="A black and yellow gears&#10;&#10;Description automatically generated with low confidence">
-              <a:extLst>
-                <a:ext uri="{FF2B5EF4-FFF2-40B4-BE49-F238E27FC236}">
-                  <a16:creationId xmlns:a16="http://schemas.microsoft.com/office/drawing/2014/main" id="{228E821C-BE41-43D9-8F07-5F848B8DA619}"/>
-                </a:ext>
-              </a:extLst>
-            </p:cNvPr>
-            <p:cNvPicPr>
-              <a:picLocks noChangeAspect="1"/>
-            </p:cNvPicPr>
-            <p:nvPr/>
-          </p:nvPicPr>
-          <p:blipFill rotWithShape="1">
-            <a:blip r:embed="rId3">
-              <a:extLst>
-                <a:ext uri="{28A0092B-C50C-407E-A947-70E740481C1C}">
-                  <a14:useLocalDpi xmlns:a14="http://schemas.microsoft.com/office/drawing/2010/main" val="0"/>
-                </a:ext>
-              </a:extLst>
-            </a:blip>
-            <a:srcRect t="5915" r="50400" b="-1"/>
-            <a:stretch/>
-          </p:blipFill>
-          <p:spPr>
-            <a:xfrm rot="21406798">
-              <a:off x="4307473" y="5520059"/>
-              <a:ext cx="1903146" cy="860394"/>
-            </a:xfrm>
-            <a:prstGeom prst="rect">
-              <a:avLst/>
-            </a:prstGeom>
-          </p:spPr>
-        </p:pic>
-        <p:sp>
-          <p:nvSpPr>
-            <p:cNvPr id="14" name="Rectangle 13">
-              <a:extLst>
-                <a:ext uri="{FF2B5EF4-FFF2-40B4-BE49-F238E27FC236}">
-                  <a16:creationId xmlns:a16="http://schemas.microsoft.com/office/drawing/2014/main" id="{653228D6-2A03-2511-59EE-82DA72BCB73E}"/>
-                </a:ext>
-              </a:extLst>
-            </p:cNvPr>
-            <p:cNvSpPr/>
-            <p:nvPr/>
-          </p:nvSpPr>
-          <p:spPr>
-            <a:xfrm rot="20464278">
-              <a:off x="224852" y="5950256"/>
-              <a:ext cx="382250" cy="338118"/>
-            </a:xfrm>
-            <a:prstGeom prst="rect">
-              <a:avLst/>
-            </a:prstGeom>
-            <a:solidFill>
-              <a:schemeClr val="bg1"/>
-            </a:solidFill>
-            <a:ln>
-              <a:noFill/>
-            </a:ln>
-          </p:spPr>
-          <p:style>
-            <a:lnRef idx="2">
-              <a:schemeClr val="accent1">
-                <a:shade val="50000"/>
-              </a:schemeClr>
-            </a:lnRef>
-            <a:fillRef idx="1">
-              <a:schemeClr val="accent1"/>
-            </a:fillRef>
-            <a:effectRef idx="0">
-              <a:schemeClr val="accent1"/>
-            </a:effectRef>
-            <a:fontRef idx="minor">
-              <a:schemeClr val="lt1"/>
-            </a:fontRef>
-          </p:style>
-          <p:txBody>
-            <a:bodyPr rtlCol="0" anchor="ctr"/>
-            <a:lstStyle/>
-            <a:p>
-              <a:pPr algn="ctr"/>
-              <a:endParaRPr lang="en-US"/>
-            </a:p>
-          </p:txBody>
-        </p:sp>
-        <p:sp>
-          <p:nvSpPr>
-            <p:cNvPr id="15" name="Rectangle 14">
-              <a:extLst>
-                <a:ext uri="{FF2B5EF4-FFF2-40B4-BE49-F238E27FC236}">
-                  <a16:creationId xmlns:a16="http://schemas.microsoft.com/office/drawing/2014/main" id="{5A650C31-1353-68BC-369C-20E03A66962A}"/>
-                </a:ext>
-              </a:extLst>
-            </p:cNvPr>
-            <p:cNvSpPr/>
-            <p:nvPr/>
-          </p:nvSpPr>
-          <p:spPr>
-            <a:xfrm rot="18513601">
-              <a:off x="424939" y="5759449"/>
-              <a:ext cx="547260" cy="783730"/>
-            </a:xfrm>
-            <a:prstGeom prst="rect">
-              <a:avLst/>
-            </a:prstGeom>
-            <a:solidFill>
-              <a:schemeClr val="bg1"/>
-            </a:solidFill>
-            <a:ln>
-              <a:noFill/>
-            </a:ln>
-          </p:spPr>
-          <p:style>
-            <a:lnRef idx="2">
-              <a:schemeClr val="accent1">
-                <a:shade val="50000"/>
-              </a:schemeClr>
-            </a:lnRef>
-            <a:fillRef idx="1">
-              <a:schemeClr val="accent1"/>
-            </a:fillRef>
-            <a:effectRef idx="0">
-              <a:schemeClr val="accent1"/>
-            </a:effectRef>
-            <a:fontRef idx="minor">
-              <a:schemeClr val="lt1"/>
-            </a:fontRef>
-          </p:style>
-          <p:txBody>
-            <a:bodyPr rtlCol="0" anchor="ctr"/>
-            <a:lstStyle/>
-            <a:p>
-              <a:pPr algn="ctr"/>
-              <a:endParaRPr lang="en-US"/>
-            </a:p>
-          </p:txBody>
-        </p:sp>
-      </p:grpSp>
-      <p:sp>
-        <p:nvSpPr>
-          <p:cNvPr id="10" name="Flowchart: Document 9">
-            <a:extLst>
-              <a:ext uri="{FF2B5EF4-FFF2-40B4-BE49-F238E27FC236}">
-                <a16:creationId xmlns:a16="http://schemas.microsoft.com/office/drawing/2014/main" id="{87DE9C71-AFF1-71C4-9DDA-B0A976429EB3}"/>
-              </a:ext>
-            </a:extLst>
-          </p:cNvPr>
-          <p:cNvSpPr/>
-          <p:nvPr/>
-        </p:nvSpPr>
-        <p:spPr>
-          <a:xfrm>
-            <a:off x="7292714" y="2508704"/>
-            <a:ext cx="4362138" cy="3924521"/>
-          </a:xfrm>
-          <a:prstGeom prst="flowChartDocument">
+            <a:off x="-1" y="0"/>
+            <a:ext cx="12191999" cy="6858000"/>
+          </a:xfrm>
+          <a:prstGeom prst="rect">
             <a:avLst/>
           </a:prstGeom>
-          <a:solidFill>
-            <a:srgbClr val="004AAD"/>
-          </a:solidFill>
+          <a:ln>
+            <a:noFill/>
+          </a:ln>
         </p:spPr>
         <p:style>
           <a:lnRef idx="2">
@@ -3688,7 +3404,101 @@
         </p:style>
         <p:txBody>
           <a:bodyPr rtlCol="0" anchor="ctr"/>
-          <a:lstStyle/>
+          <a:lstStyle>
+            <a:defPPr>
+              <a:defRPr lang="en-US"/>
+            </a:defPPr>
+            <a:lvl1pPr marL="0" algn="l" defTabSz="914400" rtl="0" eaLnBrk="1" latinLnBrk="0" hangingPunct="1">
+              <a:defRPr sz="1800" kern="1200">
+                <a:solidFill>
+                  <a:schemeClr val="lt1"/>
+                </a:solidFill>
+                <a:latin typeface="+mn-lt"/>
+                <a:ea typeface="+mn-ea"/>
+                <a:cs typeface="+mn-cs"/>
+              </a:defRPr>
+            </a:lvl1pPr>
+            <a:lvl2pPr marL="457200" algn="l" defTabSz="914400" rtl="0" eaLnBrk="1" latinLnBrk="0" hangingPunct="1">
+              <a:defRPr sz="1800" kern="1200">
+                <a:solidFill>
+                  <a:schemeClr val="lt1"/>
+                </a:solidFill>
+                <a:latin typeface="+mn-lt"/>
+                <a:ea typeface="+mn-ea"/>
+                <a:cs typeface="+mn-cs"/>
+              </a:defRPr>
+            </a:lvl2pPr>
+            <a:lvl3pPr marL="914400" algn="l" defTabSz="914400" rtl="0" eaLnBrk="1" latinLnBrk="0" hangingPunct="1">
+              <a:defRPr sz="1800" kern="1200">
+                <a:solidFill>
+                  <a:schemeClr val="lt1"/>
+                </a:solidFill>
+                <a:latin typeface="+mn-lt"/>
+                <a:ea typeface="+mn-ea"/>
+                <a:cs typeface="+mn-cs"/>
+              </a:defRPr>
+            </a:lvl3pPr>
+            <a:lvl4pPr marL="1371600" algn="l" defTabSz="914400" rtl="0" eaLnBrk="1" latinLnBrk="0" hangingPunct="1">
+              <a:defRPr sz="1800" kern="1200">
+                <a:solidFill>
+                  <a:schemeClr val="lt1"/>
+                </a:solidFill>
+                <a:latin typeface="+mn-lt"/>
+                <a:ea typeface="+mn-ea"/>
+                <a:cs typeface="+mn-cs"/>
+              </a:defRPr>
+            </a:lvl4pPr>
+            <a:lvl5pPr marL="1828800" algn="l" defTabSz="914400" rtl="0" eaLnBrk="1" latinLnBrk="0" hangingPunct="1">
+              <a:defRPr sz="1800" kern="1200">
+                <a:solidFill>
+                  <a:schemeClr val="lt1"/>
+                </a:solidFill>
+                <a:latin typeface="+mn-lt"/>
+                <a:ea typeface="+mn-ea"/>
+                <a:cs typeface="+mn-cs"/>
+              </a:defRPr>
+            </a:lvl5pPr>
+            <a:lvl6pPr marL="2286000" algn="l" defTabSz="914400" rtl="0" eaLnBrk="1" latinLnBrk="0" hangingPunct="1">
+              <a:defRPr sz="1800" kern="1200">
+                <a:solidFill>
+                  <a:schemeClr val="lt1"/>
+                </a:solidFill>
+                <a:latin typeface="+mn-lt"/>
+                <a:ea typeface="+mn-ea"/>
+                <a:cs typeface="+mn-cs"/>
+              </a:defRPr>
+            </a:lvl6pPr>
+            <a:lvl7pPr marL="2743200" algn="l" defTabSz="914400" rtl="0" eaLnBrk="1" latinLnBrk="0" hangingPunct="1">
+              <a:defRPr sz="1800" kern="1200">
+                <a:solidFill>
+                  <a:schemeClr val="lt1"/>
+                </a:solidFill>
+                <a:latin typeface="+mn-lt"/>
+                <a:ea typeface="+mn-ea"/>
+                <a:cs typeface="+mn-cs"/>
+              </a:defRPr>
+            </a:lvl7pPr>
+            <a:lvl8pPr marL="3200400" algn="l" defTabSz="914400" rtl="0" eaLnBrk="1" latinLnBrk="0" hangingPunct="1">
+              <a:defRPr sz="1800" kern="1200">
+                <a:solidFill>
+                  <a:schemeClr val="lt1"/>
+                </a:solidFill>
+                <a:latin typeface="+mn-lt"/>
+                <a:ea typeface="+mn-ea"/>
+                <a:cs typeface="+mn-cs"/>
+              </a:defRPr>
+            </a:lvl8pPr>
+            <a:lvl9pPr marL="3657600" algn="l" defTabSz="914400" rtl="0" eaLnBrk="1" latinLnBrk="0" hangingPunct="1">
+              <a:defRPr sz="1800" kern="1200">
+                <a:solidFill>
+                  <a:schemeClr val="lt1"/>
+                </a:solidFill>
+                <a:latin typeface="+mn-lt"/>
+                <a:ea typeface="+mn-ea"/>
+                <a:cs typeface="+mn-cs"/>
+              </a:defRPr>
+            </a:lvl9pPr>
+          </a:lstStyle>
           <a:p>
             <a:pPr algn="ctr"/>
             <a:endParaRPr lang="en-US"/>
@@ -3697,190 +3507,219 @@
       </p:sp>
       <p:sp>
         <p:nvSpPr>
-          <p:cNvPr id="5" name="TextBox 4">
+          <p:cNvPr id="2" name="Title 1">
             <a:extLst>
               <a:ext uri="{FF2B5EF4-FFF2-40B4-BE49-F238E27FC236}">
-                <a16:creationId xmlns:a16="http://schemas.microsoft.com/office/drawing/2014/main" id="{1F22D542-AA7D-9180-6DF0-51E3AE370804}"/>
+                <a16:creationId xmlns:a16="http://schemas.microsoft.com/office/drawing/2014/main" id="{1FBE9878-7DF0-936D-BC0F-B3A2606185F6}"/>
               </a:ext>
             </a:extLst>
           </p:cNvPr>
-          <p:cNvSpPr txBox="1"/>
-          <p:nvPr/>
+          <p:cNvSpPr>
+            <a:spLocks noGrp="1"/>
+          </p:cNvSpPr>
+          <p:nvPr>
+            <p:ph type="title"/>
+          </p:nvPr>
         </p:nvSpPr>
         <p:spPr>
           <a:xfrm>
-            <a:off x="7603670" y="2764550"/>
-            <a:ext cx="3740226" cy="3308598"/>
+            <a:off x="761802" y="762001"/>
+            <a:ext cx="4080362" cy="1708242"/>
+          </a:xfrm>
+        </p:spPr>
+        <p:txBody>
+          <a:bodyPr vert="horz" lIns="91440" tIns="45720" rIns="91440" bIns="45720" rtlCol="0" anchor="ctr">
+            <a:normAutofit/>
+          </a:bodyPr>
+          <a:lstStyle/>
+          <a:p>
+            <a:r>
+              <a:rPr lang="en-US" sz="5400" b="1" kern="1200" dirty="0">
+                <a:solidFill>
+                  <a:schemeClr val="tx1"/>
+                </a:solidFill>
+                <a:latin typeface="+mj-lt"/>
+                <a:ea typeface="+mj-ea"/>
+                <a:cs typeface="+mj-cs"/>
+              </a:rPr>
+              <a:t>Biology 6100</a:t>
+            </a:r>
+            <a:br>
+              <a:rPr lang="en-US" sz="4000" kern="1200" dirty="0">
+                <a:solidFill>
+                  <a:schemeClr val="tx1"/>
+                </a:solidFill>
+                <a:latin typeface="+mj-lt"/>
+                <a:ea typeface="+mj-ea"/>
+                <a:cs typeface="+mj-cs"/>
+              </a:rPr>
+            </a:br>
+            <a:r>
+              <a:rPr lang="en-US" sz="4000" kern="1200" dirty="0">
+                <a:solidFill>
+                  <a:schemeClr val="tx1"/>
+                </a:solidFill>
+                <a:latin typeface="+mj-lt"/>
+                <a:ea typeface="+mj-ea"/>
+                <a:cs typeface="+mj-cs"/>
+              </a:rPr>
+              <a:t>Intro to Python</a:t>
+            </a:r>
+          </a:p>
+        </p:txBody>
+      </p:sp>
+      <p:sp>
+        <p:nvSpPr>
+          <p:cNvPr id="4" name="Text Placeholder 3">
+            <a:extLst>
+              <a:ext uri="{FF2B5EF4-FFF2-40B4-BE49-F238E27FC236}">
+                <a16:creationId xmlns:a16="http://schemas.microsoft.com/office/drawing/2014/main" id="{D9389162-C8A1-3ED6-32BD-CA5CCC2C1084}"/>
+              </a:ext>
+            </a:extLst>
+          </p:cNvPr>
+          <p:cNvSpPr>
+            <a:spLocks noGrp="1"/>
+          </p:cNvSpPr>
+          <p:nvPr>
+            <p:ph type="body" sz="half" idx="2"/>
+          </p:nvPr>
+        </p:nvSpPr>
+        <p:spPr>
+          <a:xfrm>
+            <a:off x="761803" y="2470244"/>
+            <a:ext cx="4080361" cy="3769834"/>
+          </a:xfrm>
+        </p:spPr>
+        <p:txBody>
+          <a:bodyPr vert="horz" lIns="91440" tIns="45720" rIns="91440" bIns="45720" rtlCol="0" anchor="ctr">
+            <a:normAutofit/>
+          </a:bodyPr>
+          <a:lstStyle/>
+          <a:p>
+            <a:pPr indent="-228600">
+              <a:buFont typeface="Arial" panose="020B0604020202020204" pitchFamily="34" charset="0"/>
+              <a:buChar char="•"/>
+            </a:pPr>
+            <a:r>
+              <a:rPr lang="en-US" sz="2000" dirty="0"/>
+              <a:t>P. Alexander Burnham</a:t>
+            </a:r>
+          </a:p>
+          <a:p>
+            <a:pPr indent="-228600">
+              <a:buFont typeface="Arial" panose="020B0604020202020204" pitchFamily="34" charset="0"/>
+              <a:buChar char="•"/>
+            </a:pPr>
+            <a:r>
+              <a:rPr lang="en-US" sz="2000" dirty="0"/>
+              <a:t>17 March 2026</a:t>
+            </a:r>
+          </a:p>
+        </p:txBody>
+      </p:sp>
+      <p:sp>
+        <p:nvSpPr>
+          <p:cNvPr id="15" name="Rectangle 14">
+            <a:extLst>
+              <a:ext uri="{FF2B5EF4-FFF2-40B4-BE49-F238E27FC236}">
+                <a16:creationId xmlns:a16="http://schemas.microsoft.com/office/drawing/2014/main" id="{9B47378D-AD27-45D0-8C1C-5B1098DCC068}"/>
+              </a:ext>
+              <a:ext uri="{C183D7F6-B498-43B3-948B-1728B52AA6E4}">
+                <adec:decorative xmlns:adec="http://schemas.microsoft.com/office/drawing/2017/decorative" val="1"/>
+              </a:ext>
+            </a:extLst>
+          </p:cNvPr>
+          <p:cNvSpPr>
+            <a:spLocks noGrp="1" noRot="1" noChangeAspect="1" noMove="1" noResize="1" noEditPoints="1" noAdjustHandles="1" noChangeArrowheads="1" noChangeShapeType="1" noTextEdit="1"/>
+          </p:cNvSpPr>
+          <p:nvPr>
+            <p:extLst>
+              <p:ext uri="{386F3935-93C4-4BCD-93E2-E3B085C9AB24}">
+                <p16:designElem xmlns:p16="http://schemas.microsoft.com/office/powerpoint/2015/main" val="1"/>
+              </p:ext>
+            </p:extLst>
+          </p:nvPr>
+        </p:nvSpPr>
+        <p:spPr>
+          <a:xfrm>
+            <a:off x="5410200" y="0"/>
+            <a:ext cx="6781799" cy="6858000"/>
           </a:xfrm>
           <a:prstGeom prst="rect">
             <a:avLst/>
           </a:prstGeom>
-          <a:noFill/>
-        </p:spPr>
-        <p:txBody>
-          <a:bodyPr wrap="square" rtlCol="0">
-            <a:spAutoFit/>
-          </a:bodyPr>
+          <a:solidFill>
+            <a:srgbClr val="FFFFFF"/>
+          </a:solidFill>
+          <a:ln>
+            <a:noFill/>
+          </a:ln>
+          <a:effectLst>
+            <a:outerShdw blurRad="177800" dist="215900" dir="8520000" sx="94000" sy="94000" algn="t" rotWithShape="0">
+              <a:srgbClr val="000000">
+                <a:alpha val="14000"/>
+              </a:srgbClr>
+            </a:outerShdw>
+          </a:effectLst>
+        </p:spPr>
+        <p:style>
+          <a:lnRef idx="2">
+            <a:schemeClr val="accent1">
+              <a:shade val="50000"/>
+            </a:schemeClr>
+          </a:lnRef>
+          <a:fillRef idx="1">
+            <a:schemeClr val="accent1"/>
+          </a:fillRef>
+          <a:effectRef idx="0">
+            <a:schemeClr val="accent1"/>
+          </a:effectRef>
+          <a:fontRef idx="minor">
+            <a:schemeClr val="lt1"/>
+          </a:fontRef>
+        </p:style>
+        <p:txBody>
+          <a:bodyPr rtlCol="0" anchor="ctr"/>
           <a:lstStyle/>
           <a:p>
             <a:pPr algn="ctr"/>
-            <a:r>
-              <a:rPr lang="en-US" sz="2500" i="1" dirty="0">
-                <a:solidFill>
-                  <a:schemeClr val="bg1"/>
-                </a:solidFill>
-                <a:latin typeface="Posterama" panose="020B0504020200020000" pitchFamily="34" charset="0"/>
-                <a:cs typeface="Posterama" panose="020B0504020200020000" pitchFamily="34" charset="0"/>
-              </a:rPr>
-              <a:t>Session: </a:t>
-            </a:r>
-          </a:p>
-          <a:p>
-            <a:pPr algn="ctr"/>
-            <a:endParaRPr lang="en-US" b="1" i="1" dirty="0">
-              <a:solidFill>
-                <a:schemeClr val="bg1"/>
-              </a:solidFill>
-              <a:latin typeface="Posterama" panose="020B0504020200020000" pitchFamily="34" charset="0"/>
-              <a:cs typeface="Posterama" panose="020B0504020200020000" pitchFamily="34" charset="0"/>
-            </a:endParaRPr>
-          </a:p>
-          <a:p>
-            <a:pPr algn="ctr"/>
-            <a:r>
-              <a:rPr lang="en-US" sz="2200" b="1" dirty="0">
-                <a:solidFill>
-                  <a:schemeClr val="bg1"/>
-                </a:solidFill>
-                <a:latin typeface="Posterama" panose="020B0504020200020000" pitchFamily="34" charset="0"/>
-                <a:cs typeface="Posterama" panose="020B0504020200020000" pitchFamily="34" charset="0"/>
-              </a:rPr>
-              <a:t>Python 101 - Intro to Python, </a:t>
-            </a:r>
-            <a:r>
-              <a:rPr lang="en-US" sz="2200" b="1" dirty="0" err="1">
-                <a:solidFill>
-                  <a:schemeClr val="bg1"/>
-                </a:solidFill>
-                <a:latin typeface="Posterama" panose="020B0504020200020000" pitchFamily="34" charset="0"/>
-                <a:cs typeface="Posterama" panose="020B0504020200020000" pitchFamily="34" charset="0"/>
-              </a:rPr>
-              <a:t>scipy</a:t>
-            </a:r>
-            <a:r>
-              <a:rPr lang="en-US" sz="2200" b="1" dirty="0">
-                <a:solidFill>
-                  <a:schemeClr val="bg1"/>
-                </a:solidFill>
-                <a:latin typeface="Posterama" panose="020B0504020200020000" pitchFamily="34" charset="0"/>
-                <a:cs typeface="Posterama" panose="020B0504020200020000" pitchFamily="34" charset="0"/>
-              </a:rPr>
-              <a:t>, </a:t>
-            </a:r>
-            <a:r>
-              <a:rPr lang="en-US" sz="2200" b="1" dirty="0" err="1">
-                <a:solidFill>
-                  <a:schemeClr val="bg1"/>
-                </a:solidFill>
-                <a:latin typeface="Posterama" panose="020B0504020200020000" pitchFamily="34" charset="0"/>
-                <a:cs typeface="Posterama" panose="020B0504020200020000" pitchFamily="34" charset="0"/>
-              </a:rPr>
-              <a:t>numpy</a:t>
-            </a:r>
-            <a:r>
-              <a:rPr lang="en-US" sz="2200" b="1" dirty="0">
-                <a:solidFill>
-                  <a:schemeClr val="bg1"/>
-                </a:solidFill>
-                <a:latin typeface="Posterama" panose="020B0504020200020000" pitchFamily="34" charset="0"/>
-                <a:cs typeface="Posterama" panose="020B0504020200020000" pitchFamily="34" charset="0"/>
-              </a:rPr>
-              <a:t> and more</a:t>
-            </a:r>
-            <a:endParaRPr lang="en-US" b="1" dirty="0">
-              <a:solidFill>
-                <a:schemeClr val="bg1"/>
-              </a:solidFill>
-              <a:latin typeface="Posterama" panose="020B0504020200020000" pitchFamily="34" charset="0"/>
-              <a:cs typeface="Posterama" panose="020B0504020200020000" pitchFamily="34" charset="0"/>
-            </a:endParaRPr>
-          </a:p>
-          <a:p>
-            <a:pPr algn="ctr"/>
-            <a:r>
-              <a:rPr lang="en-US" b="1" dirty="0">
-                <a:solidFill>
-                  <a:schemeClr val="bg1"/>
-                </a:solidFill>
-                <a:latin typeface="Avenir Next LT Pro Demi" panose="020B0604020202020204" pitchFamily="34" charset="0"/>
-              </a:rPr>
-              <a:t>----------</a:t>
-            </a:r>
-            <a:endParaRPr lang="en-US" b="1" dirty="0">
-              <a:solidFill>
-                <a:schemeClr val="bg1"/>
-              </a:solidFill>
-              <a:latin typeface="Posterama" panose="020B0504020200020000" pitchFamily="34" charset="0"/>
-              <a:cs typeface="Posterama" panose="020B0504020200020000" pitchFamily="34" charset="0"/>
-            </a:endParaRPr>
-          </a:p>
-          <a:p>
-            <a:pPr algn="ctr"/>
-            <a:endParaRPr lang="en-US" b="1" dirty="0">
-              <a:solidFill>
-                <a:schemeClr val="bg1"/>
-              </a:solidFill>
-              <a:latin typeface="Avenir Next LT Pro Demi" panose="020B0604020202020204" pitchFamily="34" charset="0"/>
-            </a:endParaRPr>
-          </a:p>
-          <a:p>
-            <a:pPr algn="ctr"/>
-            <a:r>
-              <a:rPr lang="en-US" dirty="0">
-                <a:solidFill>
-                  <a:schemeClr val="bg1"/>
-                </a:solidFill>
-                <a:latin typeface="Avenir Next LT Pro Demi" panose="020B0604020202020204" pitchFamily="34" charset="0"/>
-              </a:rPr>
-              <a:t>Tuesday June 15, 2023</a:t>
-            </a:r>
-          </a:p>
-          <a:p>
-            <a:pPr algn="ctr"/>
-            <a:r>
-              <a:rPr lang="en-US" dirty="0">
-                <a:solidFill>
-                  <a:schemeClr val="bg1"/>
-                </a:solidFill>
-                <a:latin typeface="Avenir Next LT Pro Demi" panose="020B0604020202020204" pitchFamily="34" charset="0"/>
-              </a:rPr>
-              <a:t>9AM-12PM </a:t>
-            </a:r>
-          </a:p>
-          <a:p>
-            <a:pPr algn="ctr"/>
-            <a:endParaRPr lang="en-US" sz="1000" b="1" dirty="0">
-              <a:solidFill>
-                <a:schemeClr val="bg1"/>
-              </a:solidFill>
-              <a:latin typeface="Avenir Next LT Pro Demi" panose="020B0604020202020204" pitchFamily="34" charset="0"/>
-            </a:endParaRPr>
-          </a:p>
-          <a:p>
-            <a:pPr algn="ctr"/>
-            <a:endParaRPr lang="en-US" b="1" dirty="0">
-              <a:solidFill>
-                <a:srgbClr val="F4F1E3"/>
-              </a:solidFill>
-              <a:latin typeface="Avenir Next LT Pro Demi" panose="020B0604020202020204" pitchFamily="34" charset="0"/>
-            </a:endParaRPr>
-          </a:p>
-        </p:txBody>
-      </p:sp>
+            <a:endParaRPr lang="en-US"/>
+          </a:p>
+        </p:txBody>
+      </p:sp>
+      <p:pic>
+        <p:nvPicPr>
+          <p:cNvPr id="8" name="Picture 7" descr="Logo&#10;&#10;Description automatically generated">
+            <a:extLst>
+              <a:ext uri="{FF2B5EF4-FFF2-40B4-BE49-F238E27FC236}">
+                <a16:creationId xmlns:a16="http://schemas.microsoft.com/office/drawing/2014/main" id="{4EA0F194-8967-A2F1-C280-7E52A462E980}"/>
+              </a:ext>
+            </a:extLst>
+          </p:cNvPr>
+          <p:cNvPicPr>
+            <a:picLocks noChangeAspect="1"/>
+          </p:cNvPicPr>
+          <p:nvPr/>
+        </p:nvPicPr>
+        <p:blipFill rotWithShape="1">
+          <a:blip r:embed="rId2"/>
+          <a:srcRect l="-7607" r="7607"/>
+          <a:stretch/>
+        </p:blipFill>
+        <p:spPr>
+          <a:xfrm>
+            <a:off x="6340738" y="737488"/>
+            <a:ext cx="4844721" cy="5383025"/>
+          </a:xfrm>
+          <a:prstGeom prst="rect">
+            <a:avLst/>
+          </a:prstGeom>
+        </p:spPr>
+      </p:pic>
     </p:spTree>
     <p:extLst>
       <p:ext uri="{BB962C8B-B14F-4D97-AF65-F5344CB8AC3E}">
-        <p14:creationId xmlns:p14="http://schemas.microsoft.com/office/powerpoint/2010/main" val="703028079"/>
+        <p14:creationId xmlns:p14="http://schemas.microsoft.com/office/powerpoint/2010/main" val="2696834956"/>
       </p:ext>
     </p:extLst>
   </p:cSld>
@@ -4236,7 +4075,7 @@
           <a:p>
             <a:r>
               <a:rPr lang="en-US" sz="6600" dirty="0"/>
-              <a:t>R Studio with Reticulate</a:t>
+              <a:t>R Users and Python…</a:t>
             </a:r>
           </a:p>
         </p:txBody>
@@ -4304,13 +4143,22 @@
               <a:buChar char="•"/>
             </a:pPr>
             <a:r>
+              <a:rPr lang="en-US" sz="4400" b="0" i="0" dirty="0" err="1">
+                <a:solidFill>
+                  <a:srgbClr val="202122"/>
+                </a:solidFill>
+                <a:effectLst/>
+              </a:rPr>
+              <a:t>Rstudio</a:t>
+            </a:r>
+            <a:r>
               <a:rPr lang="en-US" sz="4400" b="0" i="0" dirty="0">
                 <a:solidFill>
                   <a:srgbClr val="202122"/>
                 </a:solidFill>
                 <a:effectLst/>
               </a:rPr>
-              <a:t>IDE for R</a:t>
+              <a:t> as an IDE for R</a:t>
             </a:r>
           </a:p>
           <a:p>
@@ -4407,6 +4255,144 @@
 </file>
 
 <file path=ppt/slides/slide12.xml><?xml version="1.0" encoding="utf-8"?>
+<p:sld xmlns:a="http://schemas.openxmlformats.org/drawingml/2006/main" xmlns:r="http://schemas.openxmlformats.org/officeDocument/2006/relationships" xmlns:p="http://schemas.openxmlformats.org/presentationml/2006/main">
+  <p:cSld>
+    <p:bg>
+      <p:bgPr>
+        <a:solidFill>
+          <a:schemeClr val="bg1"/>
+        </a:solidFill>
+        <a:effectLst/>
+      </p:bgPr>
+    </p:bg>
+    <p:spTree>
+      <p:nvGrpSpPr>
+        <p:cNvPr id="1" name="">
+          <a:extLst>
+            <a:ext uri="{FF2B5EF4-FFF2-40B4-BE49-F238E27FC236}">
+              <a16:creationId xmlns:a16="http://schemas.microsoft.com/office/drawing/2014/main" id="{3C497533-8CAE-A63F-2DFC-EFC72D5D5956}"/>
+            </a:ext>
+          </a:extLst>
+        </p:cNvPr>
+        <p:cNvGrpSpPr/>
+        <p:nvPr/>
+      </p:nvGrpSpPr>
+      <p:grpSpPr>
+        <a:xfrm>
+          <a:off x="0" y="0"/>
+          <a:ext cx="0" cy="0"/>
+          <a:chOff x="0" y="0"/>
+          <a:chExt cx="0" cy="0"/>
+        </a:xfrm>
+      </p:grpSpPr>
+      <p:pic>
+        <p:nvPicPr>
+          <p:cNvPr id="12" name="Picture 11" descr="Logo&#10;&#10;Description automatically generated">
+            <a:extLst>
+              <a:ext uri="{FF2B5EF4-FFF2-40B4-BE49-F238E27FC236}">
+                <a16:creationId xmlns:a16="http://schemas.microsoft.com/office/drawing/2014/main" id="{889B5215-EE0C-A870-4D1E-D2BD06577146}"/>
+              </a:ext>
+            </a:extLst>
+          </p:cNvPr>
+          <p:cNvPicPr>
+            <a:picLocks noChangeAspect="1"/>
+          </p:cNvPicPr>
+          <p:nvPr/>
+        </p:nvPicPr>
+        <p:blipFill rotWithShape="1">
+          <a:blip r:embed="rId2"/>
+          <a:srcRect l="-7607" r="7607"/>
+          <a:stretch/>
+        </p:blipFill>
+        <p:spPr>
+          <a:xfrm>
+            <a:off x="10096108" y="144145"/>
+            <a:ext cx="1887969" cy="2098455"/>
+          </a:xfrm>
+          <a:prstGeom prst="rect">
+            <a:avLst/>
+          </a:prstGeom>
+        </p:spPr>
+      </p:pic>
+      <p:sp>
+        <p:nvSpPr>
+          <p:cNvPr id="26" name="Title 1">
+            <a:extLst>
+              <a:ext uri="{FF2B5EF4-FFF2-40B4-BE49-F238E27FC236}">
+                <a16:creationId xmlns:a16="http://schemas.microsoft.com/office/drawing/2014/main" id="{FFB1D341-E53B-0FB4-FE52-C1CCCA4D9BB5}"/>
+              </a:ext>
+            </a:extLst>
+          </p:cNvPr>
+          <p:cNvSpPr>
+            <a:spLocks noGrp="1"/>
+          </p:cNvSpPr>
+          <p:nvPr>
+            <p:ph type="title"/>
+          </p:nvPr>
+        </p:nvSpPr>
+        <p:spPr>
+          <a:xfrm>
+            <a:off x="310345" y="330864"/>
+            <a:ext cx="10515600" cy="1325563"/>
+          </a:xfrm>
+        </p:spPr>
+        <p:txBody>
+          <a:bodyPr>
+            <a:normAutofit/>
+          </a:bodyPr>
+          <a:lstStyle/>
+          <a:p>
+            <a:r>
+              <a:rPr lang="en-US" sz="6600" dirty="0"/>
+              <a:t>Python in Positron</a:t>
+            </a:r>
+          </a:p>
+        </p:txBody>
+      </p:sp>
+      <p:pic>
+        <p:nvPicPr>
+          <p:cNvPr id="6" name="Picture 5" descr="A black text on a black background&#10;&#10;AI-generated content may be incorrect.">
+            <a:extLst>
+              <a:ext uri="{FF2B5EF4-FFF2-40B4-BE49-F238E27FC236}">
+                <a16:creationId xmlns:a16="http://schemas.microsoft.com/office/drawing/2014/main" id="{327D8523-DA46-72A1-C964-7740857399D1}"/>
+              </a:ext>
+            </a:extLst>
+          </p:cNvPr>
+          <p:cNvPicPr>
+            <a:picLocks noChangeAspect="1"/>
+          </p:cNvPicPr>
+          <p:nvPr/>
+        </p:nvPicPr>
+        <p:blipFill>
+          <a:blip r:embed="rId3"/>
+          <a:stretch>
+            <a:fillRect/>
+          </a:stretch>
+        </p:blipFill>
+        <p:spPr>
+          <a:xfrm>
+            <a:off x="167718" y="2967624"/>
+            <a:ext cx="11856563" cy="2374127"/>
+          </a:xfrm>
+          <a:prstGeom prst="rect">
+            <a:avLst/>
+          </a:prstGeom>
+        </p:spPr>
+      </p:pic>
+    </p:spTree>
+    <p:extLst>
+      <p:ext uri="{BB962C8B-B14F-4D97-AF65-F5344CB8AC3E}">
+        <p14:creationId xmlns:p14="http://schemas.microsoft.com/office/powerpoint/2010/main" val="4290650563"/>
+      </p:ext>
+    </p:extLst>
+  </p:cSld>
+  <p:clrMapOvr>
+    <a:masterClrMapping/>
+  </p:clrMapOvr>
+</p:sld>
+</file>
+
+<file path=ppt/slides/slide13.xml><?xml version="1.0" encoding="utf-8"?>
 <p:sld xmlns:a="http://schemas.openxmlformats.org/drawingml/2006/main" xmlns:r="http://schemas.openxmlformats.org/officeDocument/2006/relationships" xmlns:p="http://schemas.openxmlformats.org/presentationml/2006/main">
   <p:cSld>
     <p:bg>
@@ -5349,7 +5335,7 @@
 </p:sld>
 </file>
 
-<file path=ppt/slides/slide13.xml><?xml version="1.0" encoding="utf-8"?>
+<file path=ppt/slides/slide14.xml><?xml version="1.0" encoding="utf-8"?>
 <p:sld xmlns:a="http://schemas.openxmlformats.org/drawingml/2006/main" xmlns:r="http://schemas.openxmlformats.org/officeDocument/2006/relationships" xmlns:p="http://schemas.openxmlformats.org/presentationml/2006/main">
   <p:cSld>
     <p:bg>
@@ -6259,7 +6245,7 @@
 </p:sld>
 </file>
 
-<file path=ppt/slides/slide14.xml><?xml version="1.0" encoding="utf-8"?>
+<file path=ppt/slides/slide15.xml><?xml version="1.0" encoding="utf-8"?>
 <p:sld xmlns:a="http://schemas.openxmlformats.org/drawingml/2006/main" xmlns:r="http://schemas.openxmlformats.org/officeDocument/2006/relationships" xmlns:p="http://schemas.openxmlformats.org/presentationml/2006/main">
   <p:cSld>
     <p:bg>
@@ -7517,7 +7503,7 @@
 </p:sld>
 </file>
 
-<file path=ppt/slides/slide15.xml><?xml version="1.0" encoding="utf-8"?>
+<file path=ppt/slides/slide16.xml><?xml version="1.0" encoding="utf-8"?>
 <p:sld xmlns:a="http://schemas.openxmlformats.org/drawingml/2006/main" xmlns:r="http://schemas.openxmlformats.org/officeDocument/2006/relationships" xmlns:p="http://schemas.openxmlformats.org/presentationml/2006/main">
   <p:cSld>
     <p:bg>
@@ -8494,7 +8480,7 @@
 </p:sld>
 </file>
 
-<file path=ppt/slides/slide16.xml><?xml version="1.0" encoding="utf-8"?>
+<file path=ppt/slides/slide17.xml><?xml version="1.0" encoding="utf-8"?>
 <p:sld xmlns:a="http://schemas.openxmlformats.org/drawingml/2006/main" xmlns:r="http://schemas.openxmlformats.org/officeDocument/2006/relationships" xmlns:p="http://schemas.openxmlformats.org/presentationml/2006/main">
   <p:cSld>
     <p:bg>
@@ -9453,7 +9439,7 @@
 </p:sld>
 </file>
 
-<file path=ppt/slides/slide17.xml><?xml version="1.0" encoding="utf-8"?>
+<file path=ppt/slides/slide18.xml><?xml version="1.0" encoding="utf-8"?>
 <p:sld xmlns:a="http://schemas.openxmlformats.org/drawingml/2006/main" xmlns:r="http://schemas.openxmlformats.org/officeDocument/2006/relationships" xmlns:p="http://schemas.openxmlformats.org/presentationml/2006/main">
   <p:cSld>
     <p:spTree>
@@ -9841,7 +9827,7 @@
 </p:sld>
 </file>
 
-<file path=ppt/slides/slide18.xml><?xml version="1.0" encoding="utf-8"?>
+<file path=ppt/slides/slide19.xml><?xml version="1.0" encoding="utf-8"?>
 <p:sld xmlns:a="http://schemas.openxmlformats.org/drawingml/2006/main" xmlns:r="http://schemas.openxmlformats.org/officeDocument/2006/relationships" xmlns:p="http://schemas.openxmlformats.org/presentationml/2006/main">
   <p:cSld>
     <p:bg>
@@ -10027,17 +10013,17 @@
           <a:p>
             <a:r>
               <a:rPr lang="en-US" sz="6600" dirty="0"/>
-              <a:t>What are we doing today?</a:t>
-            </a:r>
-          </a:p>
-        </p:txBody>
-      </p:sp>
-      <p:sp>
-        <p:nvSpPr>
-          <p:cNvPr id="4" name="TextBox 3">
+              <a:t>What is Python?</a:t>
+            </a:r>
+          </a:p>
+        </p:txBody>
+      </p:sp>
+      <p:sp>
+        <p:nvSpPr>
+          <p:cNvPr id="3" name="TextBox 2">
             <a:extLst>
               <a:ext uri="{FF2B5EF4-FFF2-40B4-BE49-F238E27FC236}">
-                <a16:creationId xmlns:a16="http://schemas.microsoft.com/office/drawing/2014/main" id="{4A6D5AAF-9281-63C9-9A2D-A521B755B7B6}"/>
+                <a16:creationId xmlns:a16="http://schemas.microsoft.com/office/drawing/2014/main" id="{FD07AEBD-0359-D0D7-937E-FCE4CFD8FAB0}"/>
               </a:ext>
             </a:extLst>
           </p:cNvPr>
@@ -10046,8 +10032,8 @@
         </p:nvSpPr>
         <p:spPr>
           <a:xfrm>
-            <a:off x="310345" y="2227882"/>
-            <a:ext cx="10952388" cy="6186309"/>
+            <a:off x="241597" y="2429319"/>
+            <a:ext cx="11459676" cy="5509200"/>
           </a:xfrm>
           <a:prstGeom prst="rect">
             <a:avLst/>
@@ -10055,49 +10041,41 @@
           <a:noFill/>
         </p:spPr>
         <p:txBody>
-          <a:bodyPr wrap="square" rtlCol="0">
+          <a:bodyPr wrap="none" rtlCol="0">
             <a:spAutoFit/>
           </a:bodyPr>
           <a:lstStyle/>
           <a:p>
-            <a:pPr marL="571500" indent="-571500" algn="l">
+            <a:pPr marL="285750" indent="-285750" algn="l">
               <a:buFont typeface="Arial" panose="020B0604020202020204" pitchFamily="34" charset="0"/>
               <a:buChar char="•"/>
             </a:pPr>
             <a:r>
-              <a:rPr lang="en-US" sz="4400" dirty="0">
+              <a:rPr lang="en-US" sz="4400" b="0" i="0" dirty="0">
                 <a:solidFill>
                   <a:srgbClr val="202122"/>
                 </a:solidFill>
-              </a:rPr>
-              <a:t>Looking at a few slides (history and syntax)</a:t>
-            </a:r>
-          </a:p>
-          <a:p>
-            <a:pPr marL="571500" indent="-571500" algn="l">
+                <a:effectLst/>
+              </a:rPr>
+              <a:t>Python is a general programming language</a:t>
+            </a:r>
+          </a:p>
+          <a:p>
+            <a:pPr marL="285750" indent="-285750" algn="l">
               <a:buFont typeface="Arial" panose="020B0604020202020204" pitchFamily="34" charset="0"/>
               <a:buChar char="•"/>
             </a:pPr>
             <a:r>
-              <a:rPr lang="en-US" sz="4400" b="0" i="0" dirty="0">
+              <a:rPr lang="en-US" sz="4400" dirty="0">
                 <a:solidFill>
                   <a:srgbClr val="202122"/>
                 </a:solidFill>
-                <a:effectLst/>
-              </a:rPr>
-              <a:t>Installing reticulate, python</a:t>
-            </a:r>
-            <a:r>
-              <a:rPr lang="en-US" sz="4400" dirty="0">
-                <a:solidFill>
-                  <a:srgbClr val="202122"/>
-                </a:solidFill>
-              </a:rPr>
-              <a:t>, packages etc.</a:t>
-            </a:r>
-          </a:p>
-          <a:p>
-            <a:pPr marL="571500" indent="-571500" algn="l">
+              </a:rPr>
+              <a:t>It is high-level object-oriented language</a:t>
+            </a:r>
+          </a:p>
+          <a:p>
+            <a:pPr marL="285750" indent="-285750" algn="l">
               <a:buFont typeface="Arial" panose="020B0604020202020204" pitchFamily="34" charset="0"/>
               <a:buChar char="•"/>
             </a:pPr>
@@ -10108,74 +10086,40 @@
                 </a:solidFill>
                 <a:effectLst/>
               </a:rPr>
-              <a:t>Working though some code </a:t>
-            </a:r>
-            <a:r>
-              <a:rPr lang="en-US" sz="4400" dirty="0">
-                <a:solidFill>
-                  <a:srgbClr val="202122"/>
-                </a:solidFill>
-              </a:rPr>
-              <a:t>of</a:t>
-            </a:r>
-            <a:r>
-              <a:rPr lang="en-US" sz="4400" b="0" i="0" dirty="0">
-                <a:solidFill>
-                  <a:srgbClr val="202122"/>
-                </a:solidFill>
-                <a:effectLst/>
-              </a:rPr>
-              <a:t> increasing complexity</a:t>
-            </a:r>
-            <a:r>
-              <a:rPr lang="en-US" sz="4400" dirty="0">
-                <a:solidFill>
-                  <a:srgbClr val="202122"/>
-                </a:solidFill>
-              </a:rPr>
-              <a:t>.</a:t>
-            </a:r>
-          </a:p>
-          <a:p>
-            <a:pPr marL="571500" indent="-571500" algn="l">
+              <a:t>It has a focus on simplicity/readability</a:t>
+            </a:r>
+          </a:p>
+          <a:p>
+            <a:pPr marL="285750" indent="-285750" algn="l">
               <a:buFont typeface="Arial" panose="020B0604020202020204" pitchFamily="34" charset="0"/>
               <a:buChar char="•"/>
             </a:pPr>
             <a:r>
-              <a:rPr lang="en-US" sz="4400" dirty="0">
+              <a:rPr lang="en-US" sz="4400" b="0" i="0" dirty="0">
                 <a:solidFill>
                   <a:srgbClr val="202122"/>
                 </a:solidFill>
-              </a:rPr>
-              <a:t>Question checkpoints throughout the script.</a:t>
-            </a:r>
-          </a:p>
-          <a:p>
-            <a:pPr marL="571500" indent="-571500">
+                <a:effectLst/>
+              </a:rPr>
+              <a:t>A very versatile/powerful open source language</a:t>
+            </a:r>
+          </a:p>
+          <a:p>
+            <a:pPr marL="285750" indent="-285750" algn="l">
               <a:buFont typeface="Arial" panose="020B0604020202020204" pitchFamily="34" charset="0"/>
               <a:buChar char="•"/>
             </a:pPr>
             <a:r>
-              <a:rPr lang="en-US" sz="4400" b="0" i="0" dirty="0">
+              <a:rPr lang="en-US" sz="4400" dirty="0">
                 <a:solidFill>
                   <a:srgbClr val="202122"/>
                 </a:solidFill>
-                <a:effectLst/>
-              </a:rPr>
-              <a:t>Two 10 minute breaks</a:t>
-            </a:r>
-          </a:p>
-          <a:p>
-            <a:pPr algn="l"/>
-            <a:endParaRPr lang="en-US" sz="4400" b="0" i="0" dirty="0">
-              <a:solidFill>
-                <a:srgbClr val="202122"/>
-              </a:solidFill>
-              <a:effectLst/>
-            </a:endParaRPr>
-          </a:p>
-          <a:p>
-            <a:pPr marL="571500" indent="-571500" algn="l">
+              </a:rPr>
+              <a:t>Highly favored by developers and data scientists</a:t>
+            </a:r>
+          </a:p>
+          <a:p>
+            <a:pPr marL="285750" indent="-285750" algn="l">
               <a:buFont typeface="Arial" panose="020B0604020202020204" pitchFamily="34" charset="0"/>
               <a:buChar char="•"/>
             </a:pPr>
@@ -10187,6 +10131,18 @@
             </a:endParaRPr>
           </a:p>
           <a:p>
+            <a:pPr marL="285750" indent="-285750" algn="l">
+              <a:buFont typeface="Arial" panose="020B0604020202020204" pitchFamily="34" charset="0"/>
+              <a:buChar char="•"/>
+            </a:pPr>
+            <a:endParaRPr lang="en-US" sz="4400" b="0" i="0" dirty="0">
+              <a:solidFill>
+                <a:srgbClr val="202122"/>
+              </a:solidFill>
+              <a:effectLst/>
+            </a:endParaRPr>
+          </a:p>
+          <a:p>
             <a:endParaRPr lang="en-US" sz="4400" dirty="0"/>
           </a:p>
         </p:txBody>
@@ -10194,7 +10150,7 @@
     </p:spTree>
     <p:extLst>
       <p:ext uri="{BB962C8B-B14F-4D97-AF65-F5344CB8AC3E}">
-        <p14:creationId xmlns:p14="http://schemas.microsoft.com/office/powerpoint/2010/main" val="75610310"/>
+        <p14:creationId xmlns:p14="http://schemas.microsoft.com/office/powerpoint/2010/main" val="1929362131"/>
       </p:ext>
     </p:extLst>
   </p:cSld>
@@ -10205,6 +10161,216 @@
 </file>
 
 <file path=ppt/slides/slide3.xml><?xml version="1.0" encoding="utf-8"?>
+<p:sld xmlns:a="http://schemas.openxmlformats.org/drawingml/2006/main" xmlns:r="http://schemas.openxmlformats.org/officeDocument/2006/relationships" xmlns:p="http://schemas.openxmlformats.org/presentationml/2006/main">
+  <p:cSld>
+    <p:spTree>
+      <p:nvGrpSpPr>
+        <p:cNvPr id="1" name=""/>
+        <p:cNvGrpSpPr/>
+        <p:nvPr/>
+      </p:nvGrpSpPr>
+      <p:grpSpPr>
+        <a:xfrm>
+          <a:off x="0" y="0"/>
+          <a:ext cx="0" cy="0"/>
+          <a:chOff x="0" y="0"/>
+          <a:chExt cx="0" cy="0"/>
+        </a:xfrm>
+      </p:grpSpPr>
+      <p:pic>
+        <p:nvPicPr>
+          <p:cNvPr id="12" name="Picture 11" descr="Logo&#10;&#10;Description automatically generated">
+            <a:extLst>
+              <a:ext uri="{FF2B5EF4-FFF2-40B4-BE49-F238E27FC236}">
+                <a16:creationId xmlns:a16="http://schemas.microsoft.com/office/drawing/2014/main" id="{B7D35991-D8F4-329C-A16C-BB8C9AB5C04C}"/>
+              </a:ext>
+            </a:extLst>
+          </p:cNvPr>
+          <p:cNvPicPr>
+            <a:picLocks noChangeAspect="1"/>
+          </p:cNvPicPr>
+          <p:nvPr/>
+        </p:nvPicPr>
+        <p:blipFill rotWithShape="1">
+          <a:blip r:embed="rId2"/>
+          <a:srcRect l="-7607" r="7607"/>
+          <a:stretch/>
+        </p:blipFill>
+        <p:spPr>
+          <a:xfrm>
+            <a:off x="10096108" y="144145"/>
+            <a:ext cx="1887969" cy="2098455"/>
+          </a:xfrm>
+          <a:prstGeom prst="rect">
+            <a:avLst/>
+          </a:prstGeom>
+        </p:spPr>
+      </p:pic>
+      <p:sp>
+        <p:nvSpPr>
+          <p:cNvPr id="26" name="Title 1">
+            <a:extLst>
+              <a:ext uri="{FF2B5EF4-FFF2-40B4-BE49-F238E27FC236}">
+                <a16:creationId xmlns:a16="http://schemas.microsoft.com/office/drawing/2014/main" id="{9205852F-1FB3-D85C-872B-EDADC16ED0A7}"/>
+              </a:ext>
+            </a:extLst>
+          </p:cNvPr>
+          <p:cNvSpPr>
+            <a:spLocks noGrp="1"/>
+          </p:cNvSpPr>
+          <p:nvPr>
+            <p:ph type="title"/>
+          </p:nvPr>
+        </p:nvSpPr>
+        <p:spPr>
+          <a:xfrm>
+            <a:off x="310345" y="330864"/>
+            <a:ext cx="10515600" cy="1325563"/>
+          </a:xfrm>
+        </p:spPr>
+        <p:txBody>
+          <a:bodyPr>
+            <a:normAutofit/>
+          </a:bodyPr>
+          <a:lstStyle/>
+          <a:p>
+            <a:r>
+              <a:rPr lang="en-US" sz="6600" dirty="0"/>
+              <a:t>Python History</a:t>
+            </a:r>
+          </a:p>
+        </p:txBody>
+      </p:sp>
+      <p:sp>
+        <p:nvSpPr>
+          <p:cNvPr id="3" name="TextBox 2">
+            <a:extLst>
+              <a:ext uri="{FF2B5EF4-FFF2-40B4-BE49-F238E27FC236}">
+                <a16:creationId xmlns:a16="http://schemas.microsoft.com/office/drawing/2014/main" id="{FD07AEBD-0359-D0D7-937E-FCE4CFD8FAB0}"/>
+              </a:ext>
+            </a:extLst>
+          </p:cNvPr>
+          <p:cNvSpPr txBox="1"/>
+          <p:nvPr/>
+        </p:nvSpPr>
+        <p:spPr>
+          <a:xfrm>
+            <a:off x="310345" y="2325625"/>
+            <a:ext cx="9789475" cy="4832092"/>
+          </a:xfrm>
+          <a:prstGeom prst="rect">
+            <a:avLst/>
+          </a:prstGeom>
+          <a:noFill/>
+        </p:spPr>
+        <p:txBody>
+          <a:bodyPr wrap="none" rtlCol="0">
+            <a:spAutoFit/>
+          </a:bodyPr>
+          <a:lstStyle/>
+          <a:p>
+            <a:pPr marL="285750" indent="-285750" algn="l">
+              <a:buFont typeface="Arial" panose="020B0604020202020204" pitchFamily="34" charset="0"/>
+              <a:buChar char="•"/>
+            </a:pPr>
+            <a:r>
+              <a:rPr lang="en-US" sz="4400" b="0" i="0" dirty="0">
+                <a:solidFill>
+                  <a:srgbClr val="202122"/>
+                </a:solidFill>
+                <a:effectLst/>
+              </a:rPr>
+              <a:t>Developed by Guido van Rossum in 1989</a:t>
+            </a:r>
+          </a:p>
+          <a:p>
+            <a:pPr marL="285750" indent="-285750">
+              <a:buFont typeface="Arial" panose="020B0604020202020204" pitchFamily="34" charset="0"/>
+              <a:buChar char="•"/>
+            </a:pPr>
+            <a:r>
+              <a:rPr lang="en-US" sz="4400" b="0" i="0" dirty="0">
+                <a:solidFill>
+                  <a:srgbClr val="202122"/>
+                </a:solidFill>
+                <a:effectLst/>
+              </a:rPr>
+              <a:t>Written in C</a:t>
+            </a:r>
+          </a:p>
+          <a:p>
+            <a:pPr marL="285750" indent="-285750" algn="l">
+              <a:buFont typeface="Arial" panose="020B0604020202020204" pitchFamily="34" charset="0"/>
+              <a:buChar char="•"/>
+            </a:pPr>
+            <a:r>
+              <a:rPr lang="en-US" sz="4400" dirty="0">
+                <a:solidFill>
+                  <a:srgbClr val="202122"/>
+                </a:solidFill>
+              </a:rPr>
+              <a:t>Python 2.0 launched in 2000</a:t>
+            </a:r>
+          </a:p>
+          <a:p>
+            <a:pPr marL="285750" indent="-285750" algn="l">
+              <a:buFont typeface="Arial" panose="020B0604020202020204" pitchFamily="34" charset="0"/>
+              <a:buChar char="•"/>
+            </a:pPr>
+            <a:r>
+              <a:rPr lang="en-US" sz="4400" dirty="0">
+                <a:solidFill>
+                  <a:srgbClr val="202122"/>
+                </a:solidFill>
+              </a:rPr>
+              <a:t>Python 3.0 launched in 2008</a:t>
+            </a:r>
+          </a:p>
+          <a:p>
+            <a:pPr marL="285750" indent="-285750" algn="l">
+              <a:buFont typeface="Arial" panose="020B0604020202020204" pitchFamily="34" charset="0"/>
+              <a:buChar char="•"/>
+            </a:pPr>
+            <a:r>
+              <a:rPr lang="en-US" sz="4400" dirty="0">
+                <a:solidFill>
+                  <a:srgbClr val="202122"/>
+                </a:solidFill>
+              </a:rPr>
+              <a:t>Most notable for its design philosophy</a:t>
+            </a:r>
+          </a:p>
+          <a:p>
+            <a:pPr marL="285750" indent="-285750" algn="l">
+              <a:buFont typeface="Arial" panose="020B0604020202020204" pitchFamily="34" charset="0"/>
+              <a:buChar char="•"/>
+            </a:pPr>
+            <a:endParaRPr lang="en-US" sz="4400" b="0" i="0" dirty="0">
+              <a:solidFill>
+                <a:srgbClr val="202122"/>
+              </a:solidFill>
+              <a:effectLst/>
+            </a:endParaRPr>
+          </a:p>
+          <a:p>
+            <a:endParaRPr lang="en-US" sz="4400" dirty="0"/>
+          </a:p>
+        </p:txBody>
+      </p:sp>
+    </p:spTree>
+    <p:extLst>
+      <p:ext uri="{BB962C8B-B14F-4D97-AF65-F5344CB8AC3E}">
+        <p14:creationId xmlns:p14="http://schemas.microsoft.com/office/powerpoint/2010/main" val="4017742395"/>
+      </p:ext>
+    </p:extLst>
+  </p:cSld>
+  <p:clrMapOvr>
+    <a:masterClrMapping/>
+  </p:clrMapOvr>
+</p:sld>
+</file>
+
+<file path=ppt/slides/slide4.xml><?xml version="1.0" encoding="utf-8"?>
 <p:sld xmlns:a="http://schemas.openxmlformats.org/drawingml/2006/main" xmlns:r="http://schemas.openxmlformats.org/officeDocument/2006/relationships" xmlns:p="http://schemas.openxmlformats.org/presentationml/2006/main">
   <p:cSld>
     <p:bg>
@@ -10288,17 +10454,17 @@
           <a:p>
             <a:r>
               <a:rPr lang="en-US" sz="6600" dirty="0"/>
-              <a:t>What is Python?</a:t>
-            </a:r>
-          </a:p>
-        </p:txBody>
-      </p:sp>
-      <p:sp>
-        <p:nvSpPr>
-          <p:cNvPr id="3" name="TextBox 2">
+              <a:t>Python Culture</a:t>
+            </a:r>
+          </a:p>
+        </p:txBody>
+      </p:sp>
+      <p:sp>
+        <p:nvSpPr>
+          <p:cNvPr id="2" name="TextBox 1">
             <a:extLst>
               <a:ext uri="{FF2B5EF4-FFF2-40B4-BE49-F238E27FC236}">
-                <a16:creationId xmlns:a16="http://schemas.microsoft.com/office/drawing/2014/main" id="{FD07AEBD-0359-D0D7-937E-FCE4CFD8FAB0}"/>
+                <a16:creationId xmlns:a16="http://schemas.microsoft.com/office/drawing/2014/main" id="{373EEFE3-9901-FC03-7972-A423EC4CBC26}"/>
               </a:ext>
             </a:extLst>
           </p:cNvPr>
@@ -10307,8 +10473,8 @@
         </p:nvSpPr>
         <p:spPr>
           <a:xfrm>
-            <a:off x="241597" y="2429319"/>
-            <a:ext cx="11459676" cy="5509200"/>
+            <a:off x="833216" y="2063491"/>
+            <a:ext cx="8740021" cy="4154984"/>
           </a:xfrm>
           <a:prstGeom prst="rect">
             <a:avLst/>
@@ -10332,7 +10498,24 @@
                 </a:solidFill>
                 <a:effectLst/>
               </a:rPr>
-              <a:t>Python is a general programming language</a:t>
+              <a:t>Beautiful is better than </a:t>
+            </a:r>
+            <a:r>
+              <a:rPr lang="en-US" sz="4400" dirty="0">
+                <a:solidFill>
+                  <a:srgbClr val="202122"/>
+                </a:solidFill>
+              </a:rPr>
+              <a:t>messy</a:t>
+            </a:r>
+            <a:r>
+              <a:rPr lang="en-US" sz="4400" b="0" i="0" dirty="0">
+                <a:solidFill>
+                  <a:srgbClr val="202122"/>
+                </a:solidFill>
+                <a:effectLst/>
+              </a:rPr>
+              <a:t>.</a:t>
             </a:r>
           </a:p>
           <a:p>
@@ -10341,12 +10524,13 @@
               <a:buChar char="•"/>
             </a:pPr>
             <a:r>
-              <a:rPr lang="en-US" sz="4400" dirty="0">
+              <a:rPr lang="en-US" sz="4400" b="0" i="0" dirty="0">
                 <a:solidFill>
                   <a:srgbClr val="202122"/>
                 </a:solidFill>
-              </a:rPr>
-              <a:t>It is high-level object-oriented language</a:t>
+                <a:effectLst/>
+              </a:rPr>
+              <a:t>Explicit is better than implicit.</a:t>
             </a:r>
           </a:p>
           <a:p>
@@ -10361,7 +10545,7 @@
                 </a:solidFill>
                 <a:effectLst/>
               </a:rPr>
-              <a:t>It has a focus on simplicity/readability</a:t>
+              <a:t>Simple is better than complex.</a:t>
             </a:r>
           </a:p>
           <a:p>
@@ -10376,7 +10560,7 @@
                 </a:solidFill>
                 <a:effectLst/>
               </a:rPr>
-              <a:t>A very versatile/powerful open source language</a:t>
+              <a:t>Complex is better than complicated.</a:t>
             </a:r>
           </a:p>
           <a:p>
@@ -10385,134 +10569,17 @@
               <a:buChar char="•"/>
             </a:pPr>
             <a:r>
-              <a:rPr lang="en-US" sz="4400" dirty="0">
+              <a:rPr lang="en-US" sz="4400" b="0" i="0" dirty="0">
                 <a:solidFill>
                   <a:srgbClr val="202122"/>
                 </a:solidFill>
-              </a:rPr>
-              <a:t>Highly favored by developers and data scientists</a:t>
-            </a:r>
-          </a:p>
-          <a:p>
-            <a:pPr marL="285750" indent="-285750" algn="l">
-              <a:buFont typeface="Arial" panose="020B0604020202020204" pitchFamily="34" charset="0"/>
-              <a:buChar char="•"/>
-            </a:pPr>
-            <a:endParaRPr lang="en-US" sz="4400" b="0" i="0" dirty="0">
-              <a:solidFill>
-                <a:srgbClr val="202122"/>
-              </a:solidFill>
-              <a:effectLst/>
-            </a:endParaRPr>
-          </a:p>
-          <a:p>
-            <a:pPr marL="285750" indent="-285750" algn="l">
-              <a:buFont typeface="Arial" panose="020B0604020202020204" pitchFamily="34" charset="0"/>
-              <a:buChar char="•"/>
-            </a:pPr>
-            <a:endParaRPr lang="en-US" sz="4400" b="0" i="0" dirty="0">
-              <a:solidFill>
-                <a:srgbClr val="202122"/>
-              </a:solidFill>
-              <a:effectLst/>
-            </a:endParaRPr>
+                <a:effectLst/>
+              </a:rPr>
+              <a:t>Readability counts.</a:t>
+            </a:r>
           </a:p>
           <a:p>
             <a:endParaRPr lang="en-US" sz="4400" dirty="0"/>
-          </a:p>
-        </p:txBody>
-      </p:sp>
-    </p:spTree>
-    <p:extLst>
-      <p:ext uri="{BB962C8B-B14F-4D97-AF65-F5344CB8AC3E}">
-        <p14:creationId xmlns:p14="http://schemas.microsoft.com/office/powerpoint/2010/main" val="1929362131"/>
-      </p:ext>
-    </p:extLst>
-  </p:cSld>
-  <p:clrMapOvr>
-    <a:masterClrMapping/>
-  </p:clrMapOvr>
-</p:sld>
-</file>
-
-<file path=ppt/slides/slide4.xml><?xml version="1.0" encoding="utf-8"?>
-<p:sld xmlns:a="http://schemas.openxmlformats.org/drawingml/2006/main" xmlns:r="http://schemas.openxmlformats.org/officeDocument/2006/relationships" xmlns:p="http://schemas.openxmlformats.org/presentationml/2006/main">
-  <p:cSld>
-    <p:spTree>
-      <p:nvGrpSpPr>
-        <p:cNvPr id="1" name=""/>
-        <p:cNvGrpSpPr/>
-        <p:nvPr/>
-      </p:nvGrpSpPr>
-      <p:grpSpPr>
-        <a:xfrm>
-          <a:off x="0" y="0"/>
-          <a:ext cx="0" cy="0"/>
-          <a:chOff x="0" y="0"/>
-          <a:chExt cx="0" cy="0"/>
-        </a:xfrm>
-      </p:grpSpPr>
-      <p:pic>
-        <p:nvPicPr>
-          <p:cNvPr id="12" name="Picture 11" descr="Logo&#10;&#10;Description automatically generated">
-            <a:extLst>
-              <a:ext uri="{FF2B5EF4-FFF2-40B4-BE49-F238E27FC236}">
-                <a16:creationId xmlns:a16="http://schemas.microsoft.com/office/drawing/2014/main" id="{B7D35991-D8F4-329C-A16C-BB8C9AB5C04C}"/>
-              </a:ext>
-            </a:extLst>
-          </p:cNvPr>
-          <p:cNvPicPr>
-            <a:picLocks noChangeAspect="1"/>
-          </p:cNvPicPr>
-          <p:nvPr/>
-        </p:nvPicPr>
-        <p:blipFill rotWithShape="1">
-          <a:blip r:embed="rId2"/>
-          <a:srcRect l="-7607" r="7607"/>
-          <a:stretch/>
-        </p:blipFill>
-        <p:spPr>
-          <a:xfrm>
-            <a:off x="10096108" y="144145"/>
-            <a:ext cx="1887969" cy="2098455"/>
-          </a:xfrm>
-          <a:prstGeom prst="rect">
-            <a:avLst/>
-          </a:prstGeom>
-        </p:spPr>
-      </p:pic>
-      <p:sp>
-        <p:nvSpPr>
-          <p:cNvPr id="26" name="Title 1">
-            <a:extLst>
-              <a:ext uri="{FF2B5EF4-FFF2-40B4-BE49-F238E27FC236}">
-                <a16:creationId xmlns:a16="http://schemas.microsoft.com/office/drawing/2014/main" id="{9205852F-1FB3-D85C-872B-EDADC16ED0A7}"/>
-              </a:ext>
-            </a:extLst>
-          </p:cNvPr>
-          <p:cNvSpPr>
-            <a:spLocks noGrp="1"/>
-          </p:cNvSpPr>
-          <p:nvPr>
-            <p:ph type="title"/>
-          </p:nvPr>
-        </p:nvSpPr>
-        <p:spPr>
-          <a:xfrm>
-            <a:off x="310345" y="330864"/>
-            <a:ext cx="10515600" cy="1325563"/>
-          </a:xfrm>
-        </p:spPr>
-        <p:txBody>
-          <a:bodyPr>
-            <a:normAutofit/>
-          </a:bodyPr>
-          <a:lstStyle/>
-          <a:p>
-            <a:r>
-              <a:rPr lang="en-US" sz="6600" dirty="0"/>
-              <a:t>Python History</a:t>
-            </a:r>
           </a:p>
         </p:txBody>
       </p:sp>
@@ -10521,7 +10588,7 @@
           <p:cNvPr id="3" name="TextBox 2">
             <a:extLst>
               <a:ext uri="{FF2B5EF4-FFF2-40B4-BE49-F238E27FC236}">
-                <a16:creationId xmlns:a16="http://schemas.microsoft.com/office/drawing/2014/main" id="{FD07AEBD-0359-D0D7-937E-FCE4CFD8FAB0}"/>
+                <a16:creationId xmlns:a16="http://schemas.microsoft.com/office/drawing/2014/main" id="{D1D2C404-8014-2CC0-E857-97AD1AD0798A}"/>
               </a:ext>
             </a:extLst>
           </p:cNvPr>
@@ -10530,8 +10597,8 @@
         </p:nvSpPr>
         <p:spPr>
           <a:xfrm>
-            <a:off x="310345" y="2325625"/>
-            <a:ext cx="9789475" cy="4832092"/>
+            <a:off x="6096000" y="5542961"/>
+            <a:ext cx="2338217" cy="369332"/>
           </a:xfrm>
           <a:prstGeom prst="rect">
             <a:avLst/>
@@ -10539,116 +10606,22 @@
           <a:noFill/>
         </p:spPr>
         <p:txBody>
-          <a:bodyPr wrap="none" rtlCol="0">
+          <a:bodyPr wrap="square" rtlCol="0">
             <a:spAutoFit/>
           </a:bodyPr>
           <a:lstStyle/>
           <a:p>
-            <a:pPr marL="285750" indent="-285750" algn="l">
-              <a:buFont typeface="Arial" panose="020B0604020202020204" pitchFamily="34" charset="0"/>
-              <a:buChar char="•"/>
-            </a:pPr>
-            <a:r>
-              <a:rPr lang="en-US" sz="4400" b="0" i="0" dirty="0">
-                <a:solidFill>
-                  <a:srgbClr val="202122"/>
-                </a:solidFill>
-                <a:effectLst/>
-              </a:rPr>
-              <a:t>Developed by Guido van Rossum in 1989</a:t>
-            </a:r>
-          </a:p>
-          <a:p>
-            <a:pPr marL="285750" indent="-285750">
-              <a:buFont typeface="Arial" panose="020B0604020202020204" pitchFamily="34" charset="0"/>
-              <a:buChar char="•"/>
-            </a:pPr>
-            <a:r>
-              <a:rPr lang="en-US" sz="4400" b="0" i="0" dirty="0">
-                <a:solidFill>
-                  <a:srgbClr val="202122"/>
-                </a:solidFill>
-                <a:effectLst/>
-              </a:rPr>
-              <a:t>Written in C</a:t>
-            </a:r>
-          </a:p>
-          <a:p>
-            <a:pPr marL="285750" indent="-285750" algn="l">
-              <a:buFont typeface="Arial" panose="020B0604020202020204" pitchFamily="34" charset="0"/>
-              <a:buChar char="•"/>
-            </a:pPr>
-            <a:r>
-              <a:rPr lang="en-US" sz="4400" dirty="0">
-                <a:solidFill>
-                  <a:srgbClr val="202122"/>
-                </a:solidFill>
-              </a:rPr>
-              <a:t>Python 2.0 launched in 2000</a:t>
-            </a:r>
-          </a:p>
-          <a:p>
-            <a:pPr marL="285750" indent="-285750" algn="l">
-              <a:buFont typeface="Arial" panose="020B0604020202020204" pitchFamily="34" charset="0"/>
-              <a:buChar char="•"/>
-            </a:pPr>
-            <a:r>
-              <a:rPr lang="en-US" sz="4400" dirty="0">
-                <a:solidFill>
-                  <a:srgbClr val="202122"/>
-                </a:solidFill>
-              </a:rPr>
-              <a:t>Python 3.0 launched in 2008</a:t>
-            </a:r>
-          </a:p>
-          <a:p>
-            <a:pPr marL="285750" indent="-285750" algn="l">
-              <a:buFont typeface="Arial" panose="020B0604020202020204" pitchFamily="34" charset="0"/>
-              <a:buChar char="•"/>
-            </a:pPr>
-            <a:r>
-              <a:rPr lang="en-US" sz="4400" dirty="0">
-                <a:solidFill>
-                  <a:srgbClr val="202122"/>
-                </a:solidFill>
-              </a:rPr>
-              <a:t>Most notable for its design </a:t>
-            </a:r>
-            <a:r>
-              <a:rPr lang="en-US" sz="4400" dirty="0" err="1">
-                <a:solidFill>
-                  <a:srgbClr val="202122"/>
-                </a:solidFill>
-              </a:rPr>
-              <a:t>philosphy</a:t>
-            </a:r>
-            <a:endParaRPr lang="en-US" sz="4400" dirty="0">
-              <a:solidFill>
-                <a:srgbClr val="202122"/>
-              </a:solidFill>
-            </a:endParaRPr>
-          </a:p>
-          <a:p>
-            <a:pPr marL="285750" indent="-285750" algn="l">
-              <a:buFont typeface="Arial" panose="020B0604020202020204" pitchFamily="34" charset="0"/>
-              <a:buChar char="•"/>
-            </a:pPr>
-            <a:endParaRPr lang="en-US" sz="4400" b="0" i="0" dirty="0">
-              <a:solidFill>
-                <a:srgbClr val="202122"/>
-              </a:solidFill>
-              <a:effectLst/>
-            </a:endParaRPr>
-          </a:p>
-          <a:p>
-            <a:endParaRPr lang="en-US" sz="4400" dirty="0"/>
+            <a:r>
+              <a:rPr lang="en-US" dirty="0"/>
+              <a:t>Zen of Python, PEP20</a:t>
+            </a:r>
           </a:p>
         </p:txBody>
       </p:sp>
     </p:spTree>
     <p:extLst>
       <p:ext uri="{BB962C8B-B14F-4D97-AF65-F5344CB8AC3E}">
-        <p14:creationId xmlns:p14="http://schemas.microsoft.com/office/powerpoint/2010/main" val="4017742395"/>
+        <p14:creationId xmlns:p14="http://schemas.microsoft.com/office/powerpoint/2010/main" val="3018553476"/>
       </p:ext>
     </p:extLst>
   </p:cSld>
@@ -10742,7 +10715,7 @@
           <a:p>
             <a:r>
               <a:rPr lang="en-US" sz="6600" dirty="0"/>
-              <a:t>Python Culture</a:t>
+              <a:t>What is it good for?</a:t>
             </a:r>
           </a:p>
         </p:txBody>
@@ -10752,7 +10725,7 @@
           <p:cNvPr id="2" name="TextBox 1">
             <a:extLst>
               <a:ext uri="{FF2B5EF4-FFF2-40B4-BE49-F238E27FC236}">
-                <a16:creationId xmlns:a16="http://schemas.microsoft.com/office/drawing/2014/main" id="{373EEFE3-9901-FC03-7972-A423EC4CBC26}"/>
+                <a16:creationId xmlns:a16="http://schemas.microsoft.com/office/drawing/2014/main" id="{CB4ACD6D-13C8-98DD-1206-3F642EF6510A}"/>
               </a:ext>
             </a:extLst>
           </p:cNvPr>
@@ -10761,8 +10734,8 @@
         </p:nvSpPr>
         <p:spPr>
           <a:xfrm>
-            <a:off x="833216" y="2063491"/>
-            <a:ext cx="8740021" cy="4154984"/>
+            <a:off x="965192" y="1656427"/>
+            <a:ext cx="7547212" cy="6186309"/>
           </a:xfrm>
           <a:prstGeom prst="rect">
             <a:avLst/>
@@ -10770,23 +10743,36 @@
           <a:noFill/>
         </p:spPr>
         <p:txBody>
-          <a:bodyPr wrap="none" rtlCol="0">
+          <a:bodyPr wrap="square" rtlCol="0">
             <a:spAutoFit/>
           </a:bodyPr>
           <a:lstStyle/>
+          <a:p>
+            <a:pPr marL="285750" indent="-285750">
+              <a:buFont typeface="Arial" panose="020B0604020202020204" pitchFamily="34" charset="0"/>
+              <a:buChar char="•"/>
+            </a:pPr>
+            <a:r>
+              <a:rPr lang="en-US" sz="4400" dirty="0">
+                <a:solidFill>
+                  <a:srgbClr val="202122"/>
+                </a:solidFill>
+              </a:rPr>
+              <a:t>Web/software development</a:t>
+            </a:r>
+          </a:p>
           <a:p>
             <a:pPr marL="285750" indent="-285750" algn="l">
               <a:buFont typeface="Arial" panose="020B0604020202020204" pitchFamily="34" charset="0"/>
               <a:buChar char="•"/>
             </a:pPr>
             <a:r>
-              <a:rPr lang="en-US" sz="4400" b="0" i="0" dirty="0">
+              <a:rPr lang="en-US" sz="4400" dirty="0">
                 <a:solidFill>
                   <a:srgbClr val="202122"/>
                 </a:solidFill>
-                <a:effectLst/>
-              </a:rPr>
-              <a:t>Beautiful is better than ugly.</a:t>
+              </a:rPr>
+              <a:t>Machine Learning</a:t>
             </a:r>
           </a:p>
           <a:p>
@@ -10801,7 +10787,7 @@
                 </a:solidFill>
                 <a:effectLst/>
               </a:rPr>
-              <a:t>Explicit is better than implicit.</a:t>
+              <a:t>Mathematical Modeling</a:t>
             </a:r>
           </a:p>
           <a:p>
@@ -10810,13 +10796,12 @@
               <a:buChar char="•"/>
             </a:pPr>
             <a:r>
-              <a:rPr lang="en-US" sz="4400" b="0" i="0" dirty="0">
+              <a:rPr lang="en-US" sz="4400" dirty="0">
                 <a:solidFill>
                   <a:srgbClr val="202122"/>
                 </a:solidFill>
-                <a:effectLst/>
-              </a:rPr>
-              <a:t>Simple is better than complex.</a:t>
+              </a:rPr>
+              <a:t>Network science </a:t>
             </a:r>
           </a:p>
           <a:p>
@@ -10825,74 +10810,55 @@
               <a:buChar char="•"/>
             </a:pPr>
             <a:r>
-              <a:rPr lang="en-US" sz="4400" b="0" i="0" dirty="0">
+              <a:rPr lang="en-US" sz="4400" dirty="0">
                 <a:solidFill>
                   <a:srgbClr val="202122"/>
                 </a:solidFill>
-                <a:effectLst/>
-              </a:rPr>
-              <a:t>Complex is better than complicated.</a:t>
-            </a:r>
+              </a:rPr>
+              <a:t>Data analysis and visualization</a:t>
+            </a:r>
+          </a:p>
+          <a:p>
+            <a:pPr algn="l"/>
+            <a:endParaRPr lang="en-US" sz="4400" dirty="0">
+              <a:solidFill>
+                <a:srgbClr val="202122"/>
+              </a:solidFill>
+            </a:endParaRPr>
           </a:p>
           <a:p>
             <a:pPr marL="285750" indent="-285750" algn="l">
               <a:buFont typeface="Arial" panose="020B0604020202020204" pitchFamily="34" charset="0"/>
               <a:buChar char="•"/>
             </a:pPr>
-            <a:r>
-              <a:rPr lang="en-US" sz="4400" b="0" i="0" dirty="0">
-                <a:solidFill>
-                  <a:srgbClr val="202122"/>
-                </a:solidFill>
-                <a:effectLst/>
-              </a:rPr>
-              <a:t>Readability counts.</a:t>
-            </a:r>
+            <a:endParaRPr lang="en-US" sz="4400" b="0" i="0" dirty="0">
+              <a:solidFill>
+                <a:srgbClr val="202122"/>
+              </a:solidFill>
+              <a:effectLst/>
+            </a:endParaRPr>
+          </a:p>
+          <a:p>
+            <a:pPr marL="285750" indent="-285750" algn="l">
+              <a:buFont typeface="Arial" panose="020B0604020202020204" pitchFamily="34" charset="0"/>
+              <a:buChar char="•"/>
+            </a:pPr>
+            <a:endParaRPr lang="en-US" sz="4400" b="0" i="0" dirty="0">
+              <a:solidFill>
+                <a:srgbClr val="202122"/>
+              </a:solidFill>
+              <a:effectLst/>
+            </a:endParaRPr>
           </a:p>
           <a:p>
             <a:endParaRPr lang="en-US" sz="4400" dirty="0"/>
-          </a:p>
-        </p:txBody>
-      </p:sp>
-      <p:sp>
-        <p:nvSpPr>
-          <p:cNvPr id="3" name="TextBox 2">
-            <a:extLst>
-              <a:ext uri="{FF2B5EF4-FFF2-40B4-BE49-F238E27FC236}">
-                <a16:creationId xmlns:a16="http://schemas.microsoft.com/office/drawing/2014/main" id="{D1D2C404-8014-2CC0-E857-97AD1AD0798A}"/>
-              </a:ext>
-            </a:extLst>
-          </p:cNvPr>
-          <p:cNvSpPr txBox="1"/>
-          <p:nvPr/>
-        </p:nvSpPr>
-        <p:spPr>
-          <a:xfrm>
-            <a:off x="6096000" y="5542961"/>
-            <a:ext cx="2338217" cy="369332"/>
-          </a:xfrm>
-          <a:prstGeom prst="rect">
-            <a:avLst/>
-          </a:prstGeom>
-          <a:noFill/>
-        </p:spPr>
-        <p:txBody>
-          <a:bodyPr wrap="square" rtlCol="0">
-            <a:spAutoFit/>
-          </a:bodyPr>
-          <a:lstStyle/>
-          <a:p>
-            <a:r>
-              <a:rPr lang="en-US" dirty="0"/>
-              <a:t>Zen of Python,PEP20</a:t>
-            </a:r>
           </a:p>
         </p:txBody>
       </p:sp>
     </p:spTree>
     <p:extLst>
       <p:ext uri="{BB962C8B-B14F-4D97-AF65-F5344CB8AC3E}">
-        <p14:creationId xmlns:p14="http://schemas.microsoft.com/office/powerpoint/2010/main" val="3018553476"/>
+        <p14:creationId xmlns:p14="http://schemas.microsoft.com/office/powerpoint/2010/main" val="3584054475"/>
       </p:ext>
     </p:extLst>
   </p:cSld>
@@ -10915,7 +10881,13 @@
     </p:bg>
     <p:spTree>
       <p:nvGrpSpPr>
-        <p:cNvPr id="1" name=""/>
+        <p:cNvPr id="1" name="">
+          <a:extLst>
+            <a:ext uri="{FF2B5EF4-FFF2-40B4-BE49-F238E27FC236}">
+              <a16:creationId xmlns:a16="http://schemas.microsoft.com/office/drawing/2014/main" id="{9AB0E6FF-A324-5860-138B-855D671DD50C}"/>
+            </a:ext>
+          </a:extLst>
+        </p:cNvPr>
         <p:cNvGrpSpPr/>
         <p:nvPr/>
       </p:nvGrpSpPr>
@@ -10932,7 +10904,7 @@
           <p:cNvPr id="12" name="Picture 11" descr="Logo&#10;&#10;Description automatically generated">
             <a:extLst>
               <a:ext uri="{FF2B5EF4-FFF2-40B4-BE49-F238E27FC236}">
-                <a16:creationId xmlns:a16="http://schemas.microsoft.com/office/drawing/2014/main" id="{B7D35991-D8F4-329C-A16C-BB8C9AB5C04C}"/>
+                <a16:creationId xmlns:a16="http://schemas.microsoft.com/office/drawing/2014/main" id="{C55D144D-E9E9-16A2-DD57-7BFE166BB4AE}"/>
               </a:ext>
             </a:extLst>
           </p:cNvPr>
@@ -10961,7 +10933,7 @@
           <p:cNvPr id="26" name="Title 1">
             <a:extLst>
               <a:ext uri="{FF2B5EF4-FFF2-40B4-BE49-F238E27FC236}">
-                <a16:creationId xmlns:a16="http://schemas.microsoft.com/office/drawing/2014/main" id="{9205852F-1FB3-D85C-872B-EDADC16ED0A7}"/>
+                <a16:creationId xmlns:a16="http://schemas.microsoft.com/office/drawing/2014/main" id="{20FA3F03-38C7-7710-1375-096886D08BB1}"/>
               </a:ext>
             </a:extLst>
           </p:cNvPr>
@@ -10996,7 +10968,7 @@
           <p:cNvPr id="2" name="TextBox 1">
             <a:extLst>
               <a:ext uri="{FF2B5EF4-FFF2-40B4-BE49-F238E27FC236}">
-                <a16:creationId xmlns:a16="http://schemas.microsoft.com/office/drawing/2014/main" id="{CB4ACD6D-13C8-98DD-1206-3F642EF6510A}"/>
+                <a16:creationId xmlns:a16="http://schemas.microsoft.com/office/drawing/2014/main" id="{F4951C73-382B-B37E-1FB7-1650C0A68A7F}"/>
               </a:ext>
             </a:extLst>
           </p:cNvPr>
@@ -11006,7 +10978,7 @@
         <p:spPr>
           <a:xfrm>
             <a:off x="965192" y="1656427"/>
-            <a:ext cx="7547212" cy="6186309"/>
+            <a:ext cx="7547212" cy="6863417"/>
           </a:xfrm>
           <a:prstGeom prst="rect">
             <a:avLst/>
@@ -11087,6 +11059,20 @@
                 </a:solidFill>
               </a:rPr>
               <a:t>Data analysis and visualization</a:t>
+            </a:r>
+          </a:p>
+          <a:p>
+            <a:pPr marL="285750" indent="-285750" algn="l">
+              <a:buFont typeface="Arial" panose="020B0604020202020204" pitchFamily="34" charset="0"/>
+              <a:buChar char="•"/>
+            </a:pPr>
+            <a:r>
+              <a:rPr lang="en-US" sz="4400" dirty="0">
+                <a:solidFill>
+                  <a:srgbClr val="202122"/>
+                </a:solidFill>
+              </a:rPr>
+              <a:t>Anything and Everything</a:t>
             </a:r>
           </a:p>
           <a:p>
@@ -11129,7 +11115,7 @@
     </p:spTree>
     <p:extLst>
       <p:ext uri="{BB962C8B-B14F-4D97-AF65-F5344CB8AC3E}">
-        <p14:creationId xmlns:p14="http://schemas.microsoft.com/office/powerpoint/2010/main" val="3584054475"/>
+        <p14:creationId xmlns:p14="http://schemas.microsoft.com/office/powerpoint/2010/main" val="1166489279"/>
       </p:ext>
     </p:extLst>
   </p:cSld>
